--- a/docs/DocMind_AI_Presentation.pptx
+++ b/docs/DocMind_AI_Presentation.pptx
@@ -4095,7 +4095,7 @@
             <a:avLst/>
           </a:prstGeom>
           <a:solidFill>
-            <a:srgbClr val="0F766E"/>
+            <a:srgbClr val="C2603E"/>
           </a:solidFill>
           <a:ln>
             <a:noFill/>
@@ -4150,7 +4150,7 @@
             <a:r>
               <a:rPr sz="1600" b="1">
                 <a:solidFill>
-                  <a:srgbClr val="A7F3D0"/>
+                  <a:srgbClr val="F6E8E1"/>
                 </a:solidFill>
                 <a:latin typeface="Arial"/>
               </a:rPr>
@@ -4313,7 +4313,7 @@
           </a:prstGeom>
           <a:ln>
             <a:solidFill>
-              <a:srgbClr val="E2E8F0"/>
+              <a:srgbClr val="E6E3D8"/>
             </a:solidFill>
           </a:ln>
         </p:spPr>
@@ -4351,7 +4351,7 @@
             <a:avLst/>
           </a:prstGeom>
           <a:solidFill>
-            <a:srgbClr val="0F766E"/>
+            <a:srgbClr val="C2603E"/>
           </a:solidFill>
           <a:ln>
             <a:noFill/>
@@ -4406,7 +4406,7 @@
             <a:r>
               <a:rPr sz="3000" b="1">
                 <a:solidFill>
-                  <a:srgbClr val="0F172A"/>
+                  <a:srgbClr val="1F1E1D"/>
                 </a:solidFill>
                 <a:latin typeface="Arial"/>
               </a:rPr>
@@ -4441,7 +4441,7 @@
             <a:r>
               <a:rPr sz="1000" b="0">
                 <a:solidFill>
-                  <a:srgbClr val="64748B"/>
+                  <a:srgbClr val="75736B"/>
                 </a:solidFill>
                 <a:latin typeface="Arial"/>
               </a:rPr>
@@ -4474,7 +4474,7 @@
           </a:prstGeom>
           <a:ln>
             <a:solidFill>
-              <a:srgbClr val="E2E8F0"/>
+              <a:srgbClr val="E6E3D8"/>
             </a:solidFill>
           </a:ln>
         </p:spPr>
@@ -4509,7 +4509,7 @@
             <a:r>
               <a:rPr sz="1500" b="1">
                 <a:solidFill>
-                  <a:srgbClr val="0F172A"/>
+                  <a:srgbClr val="1F1E1D"/>
                 </a:solidFill>
                 <a:latin typeface="Arial"/>
               </a:rPr>
@@ -4518,7 +4518,7 @@
             <a:r>
               <a:rPr sz="1500">
                 <a:solidFill>
-                  <a:srgbClr val="64748B"/>
+                  <a:srgbClr val="75736B"/>
                 </a:solidFill>
                 <a:latin typeface="Arial"/>
               </a:rPr>
@@ -4534,7 +4534,7 @@
             <a:r>
               <a:rPr sz="1500" b="1">
                 <a:solidFill>
-                  <a:srgbClr val="0F172A"/>
+                  <a:srgbClr val="1F1E1D"/>
                 </a:solidFill>
                 <a:latin typeface="Arial"/>
               </a:rPr>
@@ -4543,7 +4543,7 @@
             <a:r>
               <a:rPr sz="1500">
                 <a:solidFill>
-                  <a:srgbClr val="64748B"/>
+                  <a:srgbClr val="75736B"/>
                 </a:solidFill>
                 <a:latin typeface="Arial"/>
               </a:rPr>
@@ -4559,7 +4559,7 @@
             <a:r>
               <a:rPr sz="1500" b="1">
                 <a:solidFill>
-                  <a:srgbClr val="0F172A"/>
+                  <a:srgbClr val="1F1E1D"/>
                 </a:solidFill>
                 <a:latin typeface="Arial"/>
               </a:rPr>
@@ -4568,7 +4568,7 @@
             <a:r>
               <a:rPr sz="1500">
                 <a:solidFill>
-                  <a:srgbClr val="64748B"/>
+                  <a:srgbClr val="75736B"/>
                 </a:solidFill>
                 <a:latin typeface="Arial"/>
               </a:rPr>
@@ -4584,7 +4584,7 @@
             <a:r>
               <a:rPr sz="1500" b="1">
                 <a:solidFill>
-                  <a:srgbClr val="0F172A"/>
+                  <a:srgbClr val="1F1E1D"/>
                 </a:solidFill>
                 <a:latin typeface="Arial"/>
               </a:rPr>
@@ -4593,7 +4593,7 @@
             <a:r>
               <a:rPr sz="1500">
                 <a:solidFill>
-                  <a:srgbClr val="64748B"/>
+                  <a:srgbClr val="75736B"/>
                 </a:solidFill>
                 <a:latin typeface="Arial"/>
               </a:rPr>
@@ -4635,7 +4635,7 @@
             <a:avLst/>
           </a:prstGeom>
           <a:solidFill>
-            <a:srgbClr val="0F766E"/>
+            <a:srgbClr val="C2603E"/>
           </a:solidFill>
           <a:ln>
             <a:noFill/>
@@ -4690,7 +4690,7 @@
             <a:r>
               <a:rPr sz="3000" b="1">
                 <a:solidFill>
-                  <a:srgbClr val="0F172A"/>
+                  <a:srgbClr val="1F1E1D"/>
                 </a:solidFill>
                 <a:latin typeface="Arial"/>
               </a:rPr>
@@ -4725,7 +4725,7 @@
             <a:r>
               <a:rPr sz="1000" b="0">
                 <a:solidFill>
-                  <a:srgbClr val="64748B"/>
+                  <a:srgbClr val="75736B"/>
                 </a:solidFill>
                 <a:latin typeface="Arial"/>
               </a:rPr>
@@ -4755,7 +4755,7 @@
           </a:solidFill>
           <a:ln>
             <a:solidFill>
-              <a:srgbClr val="E2E8F0"/>
+              <a:srgbClr val="E6E3D8"/>
             </a:solidFill>
           </a:ln>
           <a:effectLst/>
@@ -4808,7 +4808,7 @@
             <a:r>
               <a:rPr sz="2400" b="0">
                 <a:solidFill>
-                  <a:srgbClr val="0F172A"/>
+                  <a:srgbClr val="1F1E1D"/>
                 </a:solidFill>
                 <a:latin typeface="Arial"/>
               </a:rPr>
@@ -4843,7 +4843,7 @@
             <a:r>
               <a:rPr sz="1700" b="1">
                 <a:solidFill>
-                  <a:srgbClr val="0F172A"/>
+                  <a:srgbClr val="1F1E1D"/>
                 </a:solidFill>
                 <a:latin typeface="Arial"/>
               </a:rPr>
@@ -4878,7 +4878,7 @@
             <a:r>
               <a:rPr sz="1500" b="0">
                 <a:solidFill>
-                  <a:srgbClr val="64748B"/>
+                  <a:srgbClr val="75736B"/>
                 </a:solidFill>
                 <a:latin typeface="Arial"/>
               </a:rPr>
@@ -4908,7 +4908,7 @@
           </a:solidFill>
           <a:ln>
             <a:solidFill>
-              <a:srgbClr val="E2E8F0"/>
+              <a:srgbClr val="E6E3D8"/>
             </a:solidFill>
           </a:ln>
           <a:effectLst/>
@@ -4961,7 +4961,7 @@
             <a:r>
               <a:rPr sz="2400" b="0">
                 <a:solidFill>
-                  <a:srgbClr val="0F172A"/>
+                  <a:srgbClr val="1F1E1D"/>
                 </a:solidFill>
                 <a:latin typeface="Arial"/>
               </a:rPr>
@@ -4996,7 +4996,7 @@
             <a:r>
               <a:rPr sz="1700" b="1">
                 <a:solidFill>
-                  <a:srgbClr val="0F172A"/>
+                  <a:srgbClr val="1F1E1D"/>
                 </a:solidFill>
                 <a:latin typeface="Arial"/>
               </a:rPr>
@@ -5031,7 +5031,7 @@
             <a:r>
               <a:rPr sz="1500" b="0">
                 <a:solidFill>
-                  <a:srgbClr val="64748B"/>
+                  <a:srgbClr val="75736B"/>
                 </a:solidFill>
                 <a:latin typeface="Arial"/>
               </a:rPr>
@@ -5061,7 +5061,7 @@
           </a:solidFill>
           <a:ln>
             <a:solidFill>
-              <a:srgbClr val="E2E8F0"/>
+              <a:srgbClr val="E6E3D8"/>
             </a:solidFill>
           </a:ln>
           <a:effectLst/>
@@ -5114,7 +5114,7 @@
             <a:r>
               <a:rPr sz="2400" b="0">
                 <a:solidFill>
-                  <a:srgbClr val="0F172A"/>
+                  <a:srgbClr val="1F1E1D"/>
                 </a:solidFill>
                 <a:latin typeface="Arial"/>
               </a:rPr>
@@ -5149,7 +5149,7 @@
             <a:r>
               <a:rPr sz="1700" b="1">
                 <a:solidFill>
-                  <a:srgbClr val="0F172A"/>
+                  <a:srgbClr val="1F1E1D"/>
                 </a:solidFill>
                 <a:latin typeface="Arial"/>
               </a:rPr>
@@ -5184,7 +5184,7 @@
             <a:r>
               <a:rPr sz="1500" b="0">
                 <a:solidFill>
-                  <a:srgbClr val="64748B"/>
+                  <a:srgbClr val="75736B"/>
                 </a:solidFill>
                 <a:latin typeface="Arial"/>
               </a:rPr>
@@ -5214,7 +5214,7 @@
           </a:solidFill>
           <a:ln>
             <a:solidFill>
-              <a:srgbClr val="E2E8F0"/>
+              <a:srgbClr val="E6E3D8"/>
             </a:solidFill>
           </a:ln>
           <a:effectLst/>
@@ -5267,7 +5267,7 @@
             <a:r>
               <a:rPr sz="2400" b="0">
                 <a:solidFill>
-                  <a:srgbClr val="0F172A"/>
+                  <a:srgbClr val="1F1E1D"/>
                 </a:solidFill>
                 <a:latin typeface="Arial"/>
               </a:rPr>
@@ -5302,7 +5302,7 @@
             <a:r>
               <a:rPr sz="1700" b="1">
                 <a:solidFill>
-                  <a:srgbClr val="0F172A"/>
+                  <a:srgbClr val="1F1E1D"/>
                 </a:solidFill>
                 <a:latin typeface="Arial"/>
               </a:rPr>
@@ -5337,7 +5337,7 @@
             <a:r>
               <a:rPr sz="1500" b="0">
                 <a:solidFill>
-                  <a:srgbClr val="64748B"/>
+                  <a:srgbClr val="75736B"/>
                 </a:solidFill>
                 <a:latin typeface="Arial"/>
               </a:rPr>
@@ -5379,7 +5379,7 @@
             <a:avLst/>
           </a:prstGeom>
           <a:solidFill>
-            <a:srgbClr val="0F766E"/>
+            <a:srgbClr val="C2603E"/>
           </a:solidFill>
           <a:ln>
             <a:noFill/>
@@ -5434,7 +5434,7 @@
             <a:r>
               <a:rPr sz="3000" b="1">
                 <a:solidFill>
-                  <a:srgbClr val="0F172A"/>
+                  <a:srgbClr val="1F1E1D"/>
                 </a:solidFill>
                 <a:latin typeface="Arial"/>
               </a:rPr>
@@ -5469,7 +5469,7 @@
             <a:r>
               <a:rPr sz="1000" b="0">
                 <a:solidFill>
-                  <a:srgbClr val="64748B"/>
+                  <a:srgbClr val="75736B"/>
                 </a:solidFill>
                 <a:latin typeface="Arial"/>
               </a:rPr>
@@ -5504,7 +5504,7 @@
             <a:r>
               <a:rPr sz="2000" b="1">
                 <a:solidFill>
-                  <a:srgbClr val="0F766E"/>
+                  <a:srgbClr val="C2603E"/>
                 </a:solidFill>
                 <a:latin typeface="Arial"/>
               </a:rPr>
@@ -5543,7 +5543,7 @@
             <a:r>
               <a:rPr sz="1600" b="1">
                 <a:solidFill>
-                  <a:srgbClr val="0F172A"/>
+                  <a:srgbClr val="1F1E1D"/>
                 </a:solidFill>
                 <a:latin typeface="Arial"/>
               </a:rPr>
@@ -5552,7 +5552,7 @@
             <a:r>
               <a:rPr sz="1600">
                 <a:solidFill>
-                  <a:srgbClr val="64748B"/>
+                  <a:srgbClr val="75736B"/>
                 </a:solidFill>
                 <a:latin typeface="Arial"/>
               </a:rPr>
@@ -5568,7 +5568,7 @@
             <a:r>
               <a:rPr sz="1600" b="1">
                 <a:solidFill>
-                  <a:srgbClr val="0F172A"/>
+                  <a:srgbClr val="1F1E1D"/>
                 </a:solidFill>
                 <a:latin typeface="Arial"/>
               </a:rPr>
@@ -5577,7 +5577,7 @@
             <a:r>
               <a:rPr sz="1600">
                 <a:solidFill>
-                  <a:srgbClr val="64748B"/>
+                  <a:srgbClr val="75736B"/>
                 </a:solidFill>
                 <a:latin typeface="Arial"/>
               </a:rPr>
@@ -5593,7 +5593,7 @@
             <a:r>
               <a:rPr sz="1600" b="1">
                 <a:solidFill>
-                  <a:srgbClr val="0F172A"/>
+                  <a:srgbClr val="1F1E1D"/>
                 </a:solidFill>
                 <a:latin typeface="Arial"/>
               </a:rPr>
@@ -5602,7 +5602,7 @@
             <a:r>
               <a:rPr sz="1600">
                 <a:solidFill>
-                  <a:srgbClr val="64748B"/>
+                  <a:srgbClr val="75736B"/>
                 </a:solidFill>
                 <a:latin typeface="Arial"/>
               </a:rPr>
@@ -5618,7 +5618,7 @@
             <a:r>
               <a:rPr sz="1600" b="1">
                 <a:solidFill>
-                  <a:srgbClr val="0F172A"/>
+                  <a:srgbClr val="1F1E1D"/>
                 </a:solidFill>
                 <a:latin typeface="Arial"/>
               </a:rPr>
@@ -5627,7 +5627,7 @@
             <a:r>
               <a:rPr sz="1600">
                 <a:solidFill>
-                  <a:srgbClr val="64748B"/>
+                  <a:srgbClr val="75736B"/>
                 </a:solidFill>
                 <a:latin typeface="Arial"/>
               </a:rPr>
@@ -5643,7 +5643,7 @@
             <a:r>
               <a:rPr sz="1600" b="1">
                 <a:solidFill>
-                  <a:srgbClr val="0F172A"/>
+                  <a:srgbClr val="1F1E1D"/>
                 </a:solidFill>
                 <a:latin typeface="Arial"/>
               </a:rPr>
@@ -5652,7 +5652,7 @@
             <a:r>
               <a:rPr sz="1600">
                 <a:solidFill>
-                  <a:srgbClr val="64748B"/>
+                  <a:srgbClr val="75736B"/>
                 </a:solidFill>
                 <a:latin typeface="Arial"/>
               </a:rPr>
@@ -5668,7 +5668,7 @@
             <a:r>
               <a:rPr sz="1600" b="1">
                 <a:solidFill>
-                  <a:srgbClr val="0F172A"/>
+                  <a:srgbClr val="1F1E1D"/>
                 </a:solidFill>
                 <a:latin typeface="Arial"/>
               </a:rPr>
@@ -5677,7 +5677,7 @@
             <a:r>
               <a:rPr sz="1600">
                 <a:solidFill>
-                  <a:srgbClr val="64748B"/>
+                  <a:srgbClr val="75736B"/>
                 </a:solidFill>
                 <a:latin typeface="Arial"/>
               </a:rPr>
@@ -5712,7 +5712,7 @@
             <a:r>
               <a:rPr sz="2000" b="1">
                 <a:solidFill>
-                  <a:srgbClr val="0F766E"/>
+                  <a:srgbClr val="C2603E"/>
                 </a:solidFill>
                 <a:latin typeface="Arial"/>
               </a:rPr>
@@ -5751,7 +5751,7 @@
             <a:r>
               <a:rPr sz="1600" b="0">
                 <a:solidFill>
-                  <a:srgbClr val="0F172A"/>
+                  <a:srgbClr val="1F1E1D"/>
                 </a:solidFill>
                 <a:latin typeface="Arial"/>
               </a:rPr>
@@ -5767,7 +5767,7 @@
             <a:r>
               <a:rPr sz="1600" b="0">
                 <a:solidFill>
-                  <a:srgbClr val="0F172A"/>
+                  <a:srgbClr val="1F1E1D"/>
                 </a:solidFill>
                 <a:latin typeface="Arial"/>
               </a:rPr>
@@ -5783,7 +5783,7 @@
             <a:r>
               <a:rPr sz="1600" b="0">
                 <a:solidFill>
-                  <a:srgbClr val="0F172A"/>
+                  <a:srgbClr val="1F1E1D"/>
                 </a:solidFill>
                 <a:latin typeface="Arial"/>
               </a:rPr>
@@ -5799,7 +5799,7 @@
             <a:r>
               <a:rPr sz="1600" b="0">
                 <a:solidFill>
-                  <a:srgbClr val="0F172A"/>
+                  <a:srgbClr val="1F1E1D"/>
                 </a:solidFill>
                 <a:latin typeface="Arial"/>
               </a:rPr>
@@ -5815,7 +5815,7 @@
             <a:r>
               <a:rPr sz="1600" b="0">
                 <a:solidFill>
-                  <a:srgbClr val="0F172A"/>
+                  <a:srgbClr val="1F1E1D"/>
                 </a:solidFill>
                 <a:latin typeface="Arial"/>
               </a:rPr>
@@ -5857,7 +5857,7 @@
             <a:avLst/>
           </a:prstGeom>
           <a:solidFill>
-            <a:srgbClr val="0F766E"/>
+            <a:srgbClr val="C2603E"/>
           </a:solidFill>
           <a:ln>
             <a:noFill/>
@@ -5982,7 +5982,7 @@
             <a:r>
               <a:rPr sz="1800" b="0">
                 <a:solidFill>
-                  <a:srgbClr val="A7F3D0"/>
+                  <a:srgbClr val="F6E8E1"/>
                 </a:solidFill>
                 <a:latin typeface="Arial"/>
               </a:rPr>
@@ -6024,7 +6024,7 @@
             <a:avLst/>
           </a:prstGeom>
           <a:solidFill>
-            <a:srgbClr val="0F766E"/>
+            <a:srgbClr val="C2603E"/>
           </a:solidFill>
           <a:ln>
             <a:noFill/>
@@ -6079,7 +6079,7 @@
             <a:r>
               <a:rPr sz="3000" b="1">
                 <a:solidFill>
-                  <a:srgbClr val="0F172A"/>
+                  <a:srgbClr val="1F1E1D"/>
                 </a:solidFill>
                 <a:latin typeface="Arial"/>
               </a:rPr>
@@ -6114,7 +6114,7 @@
             <a:r>
               <a:rPr sz="1000" b="0">
                 <a:solidFill>
-                  <a:srgbClr val="64748B"/>
+                  <a:srgbClr val="75736B"/>
                 </a:solidFill>
                 <a:latin typeface="Arial"/>
               </a:rPr>
@@ -6144,7 +6144,7 @@
           </a:solidFill>
           <a:ln>
             <a:solidFill>
-              <a:srgbClr val="E2E8F0"/>
+              <a:srgbClr val="E6E3D8"/>
             </a:solidFill>
           </a:ln>
           <a:effectLst/>
@@ -6197,7 +6197,7 @@
             <a:r>
               <a:rPr sz="2400" b="0">
                 <a:solidFill>
-                  <a:srgbClr val="0F172A"/>
+                  <a:srgbClr val="1F1E1D"/>
                 </a:solidFill>
                 <a:latin typeface="Arial"/>
               </a:rPr>
@@ -6232,7 +6232,7 @@
             <a:r>
               <a:rPr sz="1700" b="1">
                 <a:solidFill>
-                  <a:srgbClr val="0F172A"/>
+                  <a:srgbClr val="1F1E1D"/>
                 </a:solidFill>
                 <a:latin typeface="Arial"/>
               </a:rPr>
@@ -6267,7 +6267,7 @@
             <a:r>
               <a:rPr sz="1300" b="0">
                 <a:solidFill>
-                  <a:srgbClr val="64748B"/>
+                  <a:srgbClr val="75736B"/>
                 </a:solidFill>
                 <a:latin typeface="Arial"/>
               </a:rPr>
@@ -6297,7 +6297,7 @@
           </a:solidFill>
           <a:ln>
             <a:solidFill>
-              <a:srgbClr val="E2E8F0"/>
+              <a:srgbClr val="E6E3D8"/>
             </a:solidFill>
           </a:ln>
           <a:effectLst/>
@@ -6350,7 +6350,7 @@
             <a:r>
               <a:rPr sz="2400" b="0">
                 <a:solidFill>
-                  <a:srgbClr val="0F172A"/>
+                  <a:srgbClr val="1F1E1D"/>
                 </a:solidFill>
                 <a:latin typeface="Arial"/>
               </a:rPr>
@@ -6385,7 +6385,7 @@
             <a:r>
               <a:rPr sz="1700" b="1">
                 <a:solidFill>
-                  <a:srgbClr val="0F172A"/>
+                  <a:srgbClr val="1F1E1D"/>
                 </a:solidFill>
                 <a:latin typeface="Arial"/>
               </a:rPr>
@@ -6420,7 +6420,7 @@
             <a:r>
               <a:rPr sz="1300" b="0">
                 <a:solidFill>
-                  <a:srgbClr val="64748B"/>
+                  <a:srgbClr val="75736B"/>
                 </a:solidFill>
                 <a:latin typeface="Arial"/>
               </a:rPr>
@@ -6450,7 +6450,7 @@
           </a:solidFill>
           <a:ln>
             <a:solidFill>
-              <a:srgbClr val="E2E8F0"/>
+              <a:srgbClr val="E6E3D8"/>
             </a:solidFill>
           </a:ln>
           <a:effectLst/>
@@ -6503,7 +6503,7 @@
             <a:r>
               <a:rPr sz="2400" b="0">
                 <a:solidFill>
-                  <a:srgbClr val="0F172A"/>
+                  <a:srgbClr val="1F1E1D"/>
                 </a:solidFill>
                 <a:latin typeface="Arial"/>
               </a:rPr>
@@ -6538,7 +6538,7 @@
             <a:r>
               <a:rPr sz="1700" b="1">
                 <a:solidFill>
-                  <a:srgbClr val="0F172A"/>
+                  <a:srgbClr val="1F1E1D"/>
                 </a:solidFill>
                 <a:latin typeface="Arial"/>
               </a:rPr>
@@ -6573,7 +6573,7 @@
             <a:r>
               <a:rPr sz="1300" b="0">
                 <a:solidFill>
-                  <a:srgbClr val="64748B"/>
+                  <a:srgbClr val="75736B"/>
                 </a:solidFill>
                 <a:latin typeface="Arial"/>
               </a:rPr>
@@ -6603,7 +6603,7 @@
           </a:solidFill>
           <a:ln>
             <a:solidFill>
-              <a:srgbClr val="E2E8F0"/>
+              <a:srgbClr val="E6E3D8"/>
             </a:solidFill>
           </a:ln>
           <a:effectLst/>
@@ -6656,7 +6656,7 @@
             <a:r>
               <a:rPr sz="2400" b="0">
                 <a:solidFill>
-                  <a:srgbClr val="0F172A"/>
+                  <a:srgbClr val="1F1E1D"/>
                 </a:solidFill>
                 <a:latin typeface="Arial"/>
               </a:rPr>
@@ -6691,7 +6691,7 @@
             <a:r>
               <a:rPr sz="1700" b="1">
                 <a:solidFill>
-                  <a:srgbClr val="0F172A"/>
+                  <a:srgbClr val="1F1E1D"/>
                 </a:solidFill>
                 <a:latin typeface="Arial"/>
               </a:rPr>
@@ -6726,7 +6726,7 @@
             <a:r>
               <a:rPr sz="1300" b="0">
                 <a:solidFill>
-                  <a:srgbClr val="64748B"/>
+                  <a:srgbClr val="75736B"/>
                 </a:solidFill>
                 <a:latin typeface="Arial"/>
               </a:rPr>
@@ -6761,7 +6761,7 @@
             <a:r>
               <a:rPr sz="1700" b="0">
                 <a:solidFill>
-                  <a:srgbClr val="64748B"/>
+                  <a:srgbClr val="75736B"/>
                 </a:solidFill>
                 <a:latin typeface="Arial"/>
               </a:rPr>
@@ -6803,7 +6803,7 @@
             <a:avLst/>
           </a:prstGeom>
           <a:solidFill>
-            <a:srgbClr val="0F766E"/>
+            <a:srgbClr val="C2603E"/>
           </a:solidFill>
           <a:ln>
             <a:noFill/>
@@ -6858,7 +6858,7 @@
             <a:r>
               <a:rPr sz="3000" b="1">
                 <a:solidFill>
-                  <a:srgbClr val="0F172A"/>
+                  <a:srgbClr val="1F1E1D"/>
                 </a:solidFill>
                 <a:latin typeface="Arial"/>
               </a:rPr>
@@ -6893,7 +6893,7 @@
             <a:r>
               <a:rPr sz="1000" b="0">
                 <a:solidFill>
-                  <a:srgbClr val="64748B"/>
+                  <a:srgbClr val="75736B"/>
                 </a:solidFill>
                 <a:latin typeface="Arial"/>
               </a:rPr>
@@ -6917,7 +6917,7 @@
             <a:avLst/>
           </a:prstGeom>
           <a:solidFill>
-            <a:srgbClr val="0F766E"/>
+            <a:srgbClr val="C2603E"/>
           </a:solidFill>
           <a:ln>
             <a:noFill/>
@@ -6980,7 +6980,7 @@
             <a:r>
               <a:rPr sz="2000" b="1">
                 <a:solidFill>
-                  <a:srgbClr val="0F172A"/>
+                  <a:srgbClr val="1F1E1D"/>
                 </a:solidFill>
                 <a:latin typeface="Arial"/>
               </a:rPr>
@@ -7015,7 +7015,7 @@
             <a:r>
               <a:rPr sz="1400" b="0">
                 <a:solidFill>
-                  <a:srgbClr val="64748B"/>
+                  <a:srgbClr val="75736B"/>
                 </a:solidFill>
                 <a:latin typeface="Arial"/>
               </a:rPr>
@@ -7039,7 +7039,7 @@
             <a:avLst/>
           </a:prstGeom>
           <a:solidFill>
-            <a:srgbClr val="0F766E"/>
+            <a:srgbClr val="C2603E"/>
           </a:solidFill>
           <a:ln>
             <a:noFill/>
@@ -7102,7 +7102,7 @@
             <a:r>
               <a:rPr sz="2000" b="1">
                 <a:solidFill>
-                  <a:srgbClr val="0F172A"/>
+                  <a:srgbClr val="1F1E1D"/>
                 </a:solidFill>
                 <a:latin typeface="Arial"/>
               </a:rPr>
@@ -7137,7 +7137,7 @@
             <a:r>
               <a:rPr sz="1400" b="0">
                 <a:solidFill>
-                  <a:srgbClr val="64748B"/>
+                  <a:srgbClr val="75736B"/>
                 </a:solidFill>
                 <a:latin typeface="Arial"/>
               </a:rPr>
@@ -7161,7 +7161,7 @@
             <a:avLst/>
           </a:prstGeom>
           <a:solidFill>
-            <a:srgbClr val="0F766E"/>
+            <a:srgbClr val="C2603E"/>
           </a:solidFill>
           <a:ln>
             <a:noFill/>
@@ -7224,7 +7224,7 @@
             <a:r>
               <a:rPr sz="2000" b="1">
                 <a:solidFill>
-                  <a:srgbClr val="0F172A"/>
+                  <a:srgbClr val="1F1E1D"/>
                 </a:solidFill>
                 <a:latin typeface="Arial"/>
               </a:rPr>
@@ -7259,7 +7259,7 @@
             <a:r>
               <a:rPr sz="1400" b="0">
                 <a:solidFill>
-                  <a:srgbClr val="64748B"/>
+                  <a:srgbClr val="75736B"/>
                 </a:solidFill>
                 <a:latin typeface="Arial"/>
               </a:rPr>
@@ -7292,7 +7292,7 @@
           </a:prstGeom>
           <a:ln>
             <a:solidFill>
-              <a:srgbClr val="E2E8F0"/>
+              <a:srgbClr val="E6E3D8"/>
             </a:solidFill>
           </a:ln>
         </p:spPr>
@@ -7330,7 +7330,7 @@
             <a:avLst/>
           </a:prstGeom>
           <a:solidFill>
-            <a:srgbClr val="0F766E"/>
+            <a:srgbClr val="C2603E"/>
           </a:solidFill>
           <a:ln>
             <a:noFill/>
@@ -7385,7 +7385,7 @@
             <a:r>
               <a:rPr sz="3000" b="1">
                 <a:solidFill>
-                  <a:srgbClr val="0F172A"/>
+                  <a:srgbClr val="1F1E1D"/>
                 </a:solidFill>
                 <a:latin typeface="Arial"/>
               </a:rPr>
@@ -7420,7 +7420,7 @@
             <a:r>
               <a:rPr sz="1000" b="0">
                 <a:solidFill>
-                  <a:srgbClr val="64748B"/>
+                  <a:srgbClr val="75736B"/>
                 </a:solidFill>
                 <a:latin typeface="Arial"/>
               </a:rPr>
@@ -7453,7 +7453,7 @@
           </a:prstGeom>
           <a:ln>
             <a:solidFill>
-              <a:srgbClr val="E2E8F0"/>
+              <a:srgbClr val="E6E3D8"/>
             </a:solidFill>
           </a:ln>
         </p:spPr>
@@ -7488,7 +7488,7 @@
             <a:r>
               <a:rPr sz="1500" b="1">
                 <a:solidFill>
-                  <a:srgbClr val="0F172A"/>
+                  <a:srgbClr val="1F1E1D"/>
                 </a:solidFill>
                 <a:latin typeface="Arial"/>
               </a:rPr>
@@ -7497,7 +7497,7 @@
             <a:r>
               <a:rPr sz="1500">
                 <a:solidFill>
-                  <a:srgbClr val="64748B"/>
+                  <a:srgbClr val="75736B"/>
                 </a:solidFill>
                 <a:latin typeface="Arial"/>
               </a:rPr>
@@ -7513,7 +7513,7 @@
             <a:r>
               <a:rPr sz="1500" b="1">
                 <a:solidFill>
-                  <a:srgbClr val="0F172A"/>
+                  <a:srgbClr val="1F1E1D"/>
                 </a:solidFill>
                 <a:latin typeface="Arial"/>
               </a:rPr>
@@ -7522,7 +7522,7 @@
             <a:r>
               <a:rPr sz="1500">
                 <a:solidFill>
-                  <a:srgbClr val="64748B"/>
+                  <a:srgbClr val="75736B"/>
                 </a:solidFill>
                 <a:latin typeface="Arial"/>
               </a:rPr>
@@ -7538,7 +7538,7 @@
             <a:r>
               <a:rPr sz="1500" b="1">
                 <a:solidFill>
-                  <a:srgbClr val="0F172A"/>
+                  <a:srgbClr val="1F1E1D"/>
                 </a:solidFill>
                 <a:latin typeface="Arial"/>
               </a:rPr>
@@ -7547,7 +7547,7 @@
             <a:r>
               <a:rPr sz="1500">
                 <a:solidFill>
-                  <a:srgbClr val="64748B"/>
+                  <a:srgbClr val="75736B"/>
                 </a:solidFill>
                 <a:latin typeface="Arial"/>
               </a:rPr>
@@ -7563,7 +7563,7 @@
             <a:r>
               <a:rPr sz="1500" b="1">
                 <a:solidFill>
-                  <a:srgbClr val="0F172A"/>
+                  <a:srgbClr val="1F1E1D"/>
                 </a:solidFill>
                 <a:latin typeface="Arial"/>
               </a:rPr>
@@ -7572,7 +7572,7 @@
             <a:r>
               <a:rPr sz="1500">
                 <a:solidFill>
-                  <a:srgbClr val="64748B"/>
+                  <a:srgbClr val="75736B"/>
                 </a:solidFill>
                 <a:latin typeface="Arial"/>
               </a:rPr>
@@ -7614,7 +7614,7 @@
             <a:avLst/>
           </a:prstGeom>
           <a:solidFill>
-            <a:srgbClr val="0F766E"/>
+            <a:srgbClr val="C2603E"/>
           </a:solidFill>
           <a:ln>
             <a:noFill/>
@@ -7669,7 +7669,7 @@
             <a:r>
               <a:rPr sz="3000" b="1">
                 <a:solidFill>
-                  <a:srgbClr val="0F172A"/>
+                  <a:srgbClr val="1F1E1D"/>
                 </a:solidFill>
                 <a:latin typeface="Arial"/>
               </a:rPr>
@@ -7704,7 +7704,7 @@
             <a:r>
               <a:rPr sz="1000" b="0">
                 <a:solidFill>
-                  <a:srgbClr val="64748B"/>
+                  <a:srgbClr val="75736B"/>
                 </a:solidFill>
                 <a:latin typeface="Arial"/>
               </a:rPr>
@@ -7734,7 +7734,7 @@
           </a:solidFill>
           <a:ln>
             <a:solidFill>
-              <a:srgbClr val="E2E8F0"/>
+              <a:srgbClr val="E6E3D8"/>
             </a:solidFill>
           </a:ln>
           <a:effectLst/>
@@ -7787,7 +7787,7 @@
             <a:r>
               <a:rPr sz="1700" b="1">
                 <a:solidFill>
-                  <a:srgbClr val="0F172A"/>
+                  <a:srgbClr val="1F1E1D"/>
                 </a:solidFill>
                 <a:latin typeface="Arial"/>
               </a:rPr>
@@ -7822,7 +7822,7 @@
             <a:r>
               <a:rPr sz="1250" b="0">
                 <a:solidFill>
-                  <a:srgbClr val="64748B"/>
+                  <a:srgbClr val="75736B"/>
                 </a:solidFill>
                 <a:latin typeface="Arial"/>
               </a:rPr>
@@ -7848,11 +7848,11 @@
             </a:avLst>
           </a:prstGeom>
           <a:solidFill>
-            <a:srgbClr val="E6F4F2"/>
+            <a:srgbClr val="F6E8E1"/>
           </a:solidFill>
           <a:ln>
             <a:solidFill>
-              <a:srgbClr val="E2E8F0"/>
+              <a:srgbClr val="E6E3D8"/>
             </a:solidFill>
           </a:ln>
           <a:effectLst/>
@@ -7905,7 +7905,7 @@
             <a:r>
               <a:rPr sz="1700" b="1">
                 <a:solidFill>
-                  <a:srgbClr val="0F172A"/>
+                  <a:srgbClr val="1F1E1D"/>
                 </a:solidFill>
                 <a:latin typeface="Arial"/>
               </a:rPr>
@@ -7940,7 +7940,7 @@
             <a:r>
               <a:rPr sz="1250" b="0">
                 <a:solidFill>
-                  <a:srgbClr val="64748B"/>
+                  <a:srgbClr val="75736B"/>
                 </a:solidFill>
                 <a:latin typeface="Arial"/>
               </a:rPr>
@@ -7966,11 +7966,11 @@
             </a:avLst>
           </a:prstGeom>
           <a:solidFill>
-            <a:srgbClr val="E6F4F2"/>
+            <a:srgbClr val="F6E8E1"/>
           </a:solidFill>
           <a:ln>
             <a:solidFill>
-              <a:srgbClr val="E2E8F0"/>
+              <a:srgbClr val="E6E3D8"/>
             </a:solidFill>
           </a:ln>
           <a:effectLst/>
@@ -8023,7 +8023,7 @@
             <a:r>
               <a:rPr sz="1700" b="1">
                 <a:solidFill>
-                  <a:srgbClr val="0F172A"/>
+                  <a:srgbClr val="1F1E1D"/>
                 </a:solidFill>
                 <a:latin typeface="Arial"/>
               </a:rPr>
@@ -8058,7 +8058,7 @@
             <a:r>
               <a:rPr sz="1250" b="0">
                 <a:solidFill>
-                  <a:srgbClr val="64748B"/>
+                  <a:srgbClr val="75736B"/>
                 </a:solidFill>
                 <a:latin typeface="Arial"/>
               </a:rPr>
@@ -8091,7 +8091,7 @@
           </a:prstGeom>
           <a:ln>
             <a:solidFill>
-              <a:srgbClr val="E2E8F0"/>
+              <a:srgbClr val="E6E3D8"/>
             </a:solidFill>
           </a:ln>
         </p:spPr>
@@ -8120,7 +8120,7 @@
           </a:prstGeom>
           <a:ln>
             <a:solidFill>
-              <a:srgbClr val="E2E8F0"/>
+              <a:srgbClr val="E6E3D8"/>
             </a:solidFill>
           </a:ln>
         </p:spPr>
@@ -8158,7 +8158,7 @@
             <a:avLst/>
           </a:prstGeom>
           <a:solidFill>
-            <a:srgbClr val="0F766E"/>
+            <a:srgbClr val="C2603E"/>
           </a:solidFill>
           <a:ln>
             <a:noFill/>
@@ -8213,7 +8213,7 @@
             <a:r>
               <a:rPr sz="3000" b="1">
                 <a:solidFill>
-                  <a:srgbClr val="0F172A"/>
+                  <a:srgbClr val="1F1E1D"/>
                 </a:solidFill>
                 <a:latin typeface="Arial"/>
               </a:rPr>
@@ -8248,7 +8248,7 @@
             <a:r>
               <a:rPr sz="1000" b="0">
                 <a:solidFill>
-                  <a:srgbClr val="64748B"/>
+                  <a:srgbClr val="75736B"/>
                 </a:solidFill>
                 <a:latin typeface="Arial"/>
               </a:rPr>
@@ -8278,7 +8278,7 @@
           </a:solidFill>
           <a:ln>
             <a:solidFill>
-              <a:srgbClr val="E2E8F0"/>
+              <a:srgbClr val="E6E3D8"/>
             </a:solidFill>
           </a:ln>
           <a:effectLst/>
@@ -8331,7 +8331,7 @@
             <a:r>
               <a:rPr sz="2800" b="0">
                 <a:solidFill>
-                  <a:srgbClr val="0F172A"/>
+                  <a:srgbClr val="1F1E1D"/>
                 </a:solidFill>
                 <a:latin typeface="Arial"/>
               </a:rPr>
@@ -8366,7 +8366,7 @@
             <a:r>
               <a:rPr sz="1800" b="1">
                 <a:solidFill>
-                  <a:srgbClr val="0F172A"/>
+                  <a:srgbClr val="1F1E1D"/>
                 </a:solidFill>
                 <a:latin typeface="Arial"/>
               </a:rPr>
@@ -8401,7 +8401,7 @@
             <a:r>
               <a:rPr sz="1300" b="0">
                 <a:solidFill>
-                  <a:srgbClr val="64748B"/>
+                  <a:srgbClr val="75736B"/>
                 </a:solidFill>
                 <a:latin typeface="Arial"/>
               </a:rPr>
@@ -8426,7 +8426,7 @@
             <a:avLst/>
           </a:prstGeom>
           <a:solidFill>
-            <a:srgbClr val="0F766E"/>
+            <a:srgbClr val="C2603E"/>
           </a:solidFill>
           <a:ln>
             <a:noFill/>
@@ -8475,7 +8475,7 @@
           </a:solidFill>
           <a:ln>
             <a:solidFill>
-              <a:srgbClr val="E2E8F0"/>
+              <a:srgbClr val="E6E3D8"/>
             </a:solidFill>
           </a:ln>
           <a:effectLst/>
@@ -8528,7 +8528,7 @@
             <a:r>
               <a:rPr sz="2800" b="0">
                 <a:solidFill>
-                  <a:srgbClr val="0F172A"/>
+                  <a:srgbClr val="1F1E1D"/>
                 </a:solidFill>
                 <a:latin typeface="Arial"/>
               </a:rPr>
@@ -8563,7 +8563,7 @@
             <a:r>
               <a:rPr sz="1800" b="1">
                 <a:solidFill>
-                  <a:srgbClr val="0F172A"/>
+                  <a:srgbClr val="1F1E1D"/>
                 </a:solidFill>
                 <a:latin typeface="Arial"/>
               </a:rPr>
@@ -8598,7 +8598,7 @@
             <a:r>
               <a:rPr sz="1300" b="0">
                 <a:solidFill>
-                  <a:srgbClr val="64748B"/>
+                  <a:srgbClr val="75736B"/>
                 </a:solidFill>
                 <a:latin typeface="Arial"/>
               </a:rPr>
@@ -8623,7 +8623,7 @@
             <a:avLst/>
           </a:prstGeom>
           <a:solidFill>
-            <a:srgbClr val="0F766E"/>
+            <a:srgbClr val="C2603E"/>
           </a:solidFill>
           <a:ln>
             <a:noFill/>
@@ -8668,11 +8668,11 @@
             </a:avLst>
           </a:prstGeom>
           <a:solidFill>
-            <a:srgbClr val="E6F4F2"/>
+            <a:srgbClr val="F6E8E1"/>
           </a:solidFill>
           <a:ln>
             <a:solidFill>
-              <a:srgbClr val="E2E8F0"/>
+              <a:srgbClr val="E6E3D8"/>
             </a:solidFill>
           </a:ln>
           <a:effectLst/>
@@ -8725,7 +8725,7 @@
             <a:r>
               <a:rPr sz="2800" b="0">
                 <a:solidFill>
-                  <a:srgbClr val="0F172A"/>
+                  <a:srgbClr val="1F1E1D"/>
                 </a:solidFill>
                 <a:latin typeface="Arial"/>
               </a:rPr>
@@ -8760,7 +8760,7 @@
             <a:r>
               <a:rPr sz="1800" b="1">
                 <a:solidFill>
-                  <a:srgbClr val="0F172A"/>
+                  <a:srgbClr val="1F1E1D"/>
                 </a:solidFill>
                 <a:latin typeface="Arial"/>
               </a:rPr>
@@ -8795,7 +8795,7 @@
             <a:r>
               <a:rPr sz="1300" b="0">
                 <a:solidFill>
-                  <a:srgbClr val="64748B"/>
+                  <a:srgbClr val="75736B"/>
                 </a:solidFill>
                 <a:latin typeface="Arial"/>
               </a:rPr>
@@ -8820,7 +8820,7 @@
             <a:avLst/>
           </a:prstGeom>
           <a:solidFill>
-            <a:srgbClr val="0F766E"/>
+            <a:srgbClr val="C2603E"/>
           </a:solidFill>
           <a:ln>
             <a:noFill/>
@@ -8865,11 +8865,11 @@
             </a:avLst>
           </a:prstGeom>
           <a:solidFill>
-            <a:srgbClr val="E6F4F2"/>
+            <a:srgbClr val="F6E8E1"/>
           </a:solidFill>
           <a:ln>
             <a:solidFill>
-              <a:srgbClr val="E2E8F0"/>
+              <a:srgbClr val="E6E3D8"/>
             </a:solidFill>
           </a:ln>
           <a:effectLst/>
@@ -8922,7 +8922,7 @@
             <a:r>
               <a:rPr sz="2800" b="0">
                 <a:solidFill>
-                  <a:srgbClr val="0F172A"/>
+                  <a:srgbClr val="1F1E1D"/>
                 </a:solidFill>
                 <a:latin typeface="Arial"/>
               </a:rPr>
@@ -8957,7 +8957,7 @@
             <a:r>
               <a:rPr sz="1800" b="1">
                 <a:solidFill>
-                  <a:srgbClr val="0F172A"/>
+                  <a:srgbClr val="1F1E1D"/>
                 </a:solidFill>
                 <a:latin typeface="Arial"/>
               </a:rPr>
@@ -8992,7 +8992,7 @@
             <a:r>
               <a:rPr sz="1300" b="0">
                 <a:solidFill>
-                  <a:srgbClr val="64748B"/>
+                  <a:srgbClr val="75736B"/>
                 </a:solidFill>
                 <a:latin typeface="Arial"/>
               </a:rPr>
@@ -9017,7 +9017,7 @@
             <a:avLst/>
           </a:prstGeom>
           <a:solidFill>
-            <a:srgbClr val="0F766E"/>
+            <a:srgbClr val="C2603E"/>
           </a:solidFill>
           <a:ln>
             <a:noFill/>
@@ -9066,7 +9066,7 @@
           </a:solidFill>
           <a:ln>
             <a:solidFill>
-              <a:srgbClr val="E2E8F0"/>
+              <a:srgbClr val="E6E3D8"/>
             </a:solidFill>
           </a:ln>
           <a:effectLst/>
@@ -9119,7 +9119,7 @@
             <a:r>
               <a:rPr sz="2800" b="0">
                 <a:solidFill>
-                  <a:srgbClr val="0F172A"/>
+                  <a:srgbClr val="1F1E1D"/>
                 </a:solidFill>
                 <a:latin typeface="Arial"/>
               </a:rPr>
@@ -9154,7 +9154,7 @@
             <a:r>
               <a:rPr sz="1800" b="1">
                 <a:solidFill>
-                  <a:srgbClr val="0F172A"/>
+                  <a:srgbClr val="1F1E1D"/>
                 </a:solidFill>
                 <a:latin typeface="Arial"/>
               </a:rPr>
@@ -9189,7 +9189,7 @@
             <a:r>
               <a:rPr sz="1300" b="0">
                 <a:solidFill>
-                  <a:srgbClr val="64748B"/>
+                  <a:srgbClr val="75736B"/>
                 </a:solidFill>
                 <a:latin typeface="Arial"/>
               </a:rPr>
@@ -9229,7 +9229,7 @@
             <a:r>
               <a:rPr sz="1600" b="1">
                 <a:solidFill>
-                  <a:srgbClr val="0F172A"/>
+                  <a:srgbClr val="1F1E1D"/>
                 </a:solidFill>
                 <a:latin typeface="Arial"/>
               </a:rPr>
@@ -9238,7 +9238,7 @@
             <a:r>
               <a:rPr sz="1600">
                 <a:solidFill>
-                  <a:srgbClr val="64748B"/>
+                  <a:srgbClr val="75736B"/>
                 </a:solidFill>
                 <a:latin typeface="Arial"/>
               </a:rPr>
@@ -9254,7 +9254,7 @@
             <a:r>
               <a:rPr sz="1600" b="1">
                 <a:solidFill>
-                  <a:srgbClr val="0F172A"/>
+                  <a:srgbClr val="1F1E1D"/>
                 </a:solidFill>
                 <a:latin typeface="Arial"/>
               </a:rPr>
@@ -9263,7 +9263,7 @@
             <a:r>
               <a:rPr sz="1600">
                 <a:solidFill>
-                  <a:srgbClr val="64748B"/>
+                  <a:srgbClr val="75736B"/>
                 </a:solidFill>
                 <a:latin typeface="Arial"/>
               </a:rPr>
@@ -9279,7 +9279,7 @@
             <a:r>
               <a:rPr sz="1600" b="1">
                 <a:solidFill>
-                  <a:srgbClr val="0F172A"/>
+                  <a:srgbClr val="1F1E1D"/>
                 </a:solidFill>
                 <a:latin typeface="Arial"/>
               </a:rPr>
@@ -9288,7 +9288,7 @@
             <a:r>
               <a:rPr sz="1600">
                 <a:solidFill>
-                  <a:srgbClr val="64748B"/>
+                  <a:srgbClr val="75736B"/>
                 </a:solidFill>
                 <a:latin typeface="Arial"/>
               </a:rPr>
@@ -9330,7 +9330,7 @@
             <a:avLst/>
           </a:prstGeom>
           <a:solidFill>
-            <a:srgbClr val="0F766E"/>
+            <a:srgbClr val="C2603E"/>
           </a:solidFill>
           <a:ln>
             <a:noFill/>
@@ -9385,7 +9385,7 @@
             <a:r>
               <a:rPr sz="3000" b="1">
                 <a:solidFill>
-                  <a:srgbClr val="0F172A"/>
+                  <a:srgbClr val="1F1E1D"/>
                 </a:solidFill>
                 <a:latin typeface="Arial"/>
               </a:rPr>
@@ -9420,7 +9420,7 @@
             <a:r>
               <a:rPr sz="1000" b="0">
                 <a:solidFill>
-                  <a:srgbClr val="64748B"/>
+                  <a:srgbClr val="75736B"/>
                 </a:solidFill>
                 <a:latin typeface="Arial"/>
               </a:rPr>
@@ -9450,7 +9450,7 @@
           </a:solidFill>
           <a:ln>
             <a:solidFill>
-              <a:srgbClr val="E2E8F0"/>
+              <a:srgbClr val="E6E3D8"/>
             </a:solidFill>
           </a:ln>
           <a:effectLst/>
@@ -9503,7 +9503,7 @@
             <a:r>
               <a:rPr sz="2400" b="0">
                 <a:solidFill>
-                  <a:srgbClr val="0F172A"/>
+                  <a:srgbClr val="1F1E1D"/>
                 </a:solidFill>
                 <a:latin typeface="Arial"/>
               </a:rPr>
@@ -9538,7 +9538,7 @@
             <a:r>
               <a:rPr sz="1600" b="1">
                 <a:solidFill>
-                  <a:srgbClr val="0F172A"/>
+                  <a:srgbClr val="1F1E1D"/>
                 </a:solidFill>
                 <a:latin typeface="Arial"/>
               </a:rPr>
@@ -9573,7 +9573,7 @@
             <a:r>
               <a:rPr sz="1250" b="0">
                 <a:solidFill>
-                  <a:srgbClr val="64748B"/>
+                  <a:srgbClr val="75736B"/>
                 </a:solidFill>
                 <a:latin typeface="Arial"/>
               </a:rPr>
@@ -9603,7 +9603,7 @@
           </a:solidFill>
           <a:ln>
             <a:solidFill>
-              <a:srgbClr val="E2E8F0"/>
+              <a:srgbClr val="E6E3D8"/>
             </a:solidFill>
           </a:ln>
           <a:effectLst/>
@@ -9656,7 +9656,7 @@
             <a:r>
               <a:rPr sz="2400" b="0">
                 <a:solidFill>
-                  <a:srgbClr val="0F172A"/>
+                  <a:srgbClr val="1F1E1D"/>
                 </a:solidFill>
                 <a:latin typeface="Arial"/>
               </a:rPr>
@@ -9691,7 +9691,7 @@
             <a:r>
               <a:rPr sz="1600" b="1">
                 <a:solidFill>
-                  <a:srgbClr val="0F172A"/>
+                  <a:srgbClr val="1F1E1D"/>
                 </a:solidFill>
                 <a:latin typeface="Arial"/>
               </a:rPr>
@@ -9726,7 +9726,7 @@
             <a:r>
               <a:rPr sz="1250" b="0">
                 <a:solidFill>
-                  <a:srgbClr val="64748B"/>
+                  <a:srgbClr val="75736B"/>
                 </a:solidFill>
                 <a:latin typeface="Arial"/>
               </a:rPr>
@@ -9756,7 +9756,7 @@
           </a:solidFill>
           <a:ln>
             <a:solidFill>
-              <a:srgbClr val="E2E8F0"/>
+              <a:srgbClr val="E6E3D8"/>
             </a:solidFill>
           </a:ln>
           <a:effectLst/>
@@ -9809,7 +9809,7 @@
             <a:r>
               <a:rPr sz="2400" b="0">
                 <a:solidFill>
-                  <a:srgbClr val="0F172A"/>
+                  <a:srgbClr val="1F1E1D"/>
                 </a:solidFill>
                 <a:latin typeface="Arial"/>
               </a:rPr>
@@ -9844,7 +9844,7 @@
             <a:r>
               <a:rPr sz="1600" b="1">
                 <a:solidFill>
-                  <a:srgbClr val="0F172A"/>
+                  <a:srgbClr val="1F1E1D"/>
                 </a:solidFill>
                 <a:latin typeface="Arial"/>
               </a:rPr>
@@ -9879,7 +9879,7 @@
             <a:r>
               <a:rPr sz="1250" b="0">
                 <a:solidFill>
-                  <a:srgbClr val="64748B"/>
+                  <a:srgbClr val="75736B"/>
                 </a:solidFill>
                 <a:latin typeface="Arial"/>
               </a:rPr>
@@ -9909,7 +9909,7 @@
           </a:solidFill>
           <a:ln>
             <a:solidFill>
-              <a:srgbClr val="E2E8F0"/>
+              <a:srgbClr val="E6E3D8"/>
             </a:solidFill>
           </a:ln>
           <a:effectLst/>
@@ -9962,7 +9962,7 @@
             <a:r>
               <a:rPr sz="2400" b="0">
                 <a:solidFill>
-                  <a:srgbClr val="0F172A"/>
+                  <a:srgbClr val="1F1E1D"/>
                 </a:solidFill>
                 <a:latin typeface="Arial"/>
               </a:rPr>
@@ -9997,7 +9997,7 @@
             <a:r>
               <a:rPr sz="1600" b="1">
                 <a:solidFill>
-                  <a:srgbClr val="0F172A"/>
+                  <a:srgbClr val="1F1E1D"/>
                 </a:solidFill>
                 <a:latin typeface="Arial"/>
               </a:rPr>
@@ -10032,7 +10032,7 @@
             <a:r>
               <a:rPr sz="1250" b="0">
                 <a:solidFill>
-                  <a:srgbClr val="64748B"/>
+                  <a:srgbClr val="75736B"/>
                 </a:solidFill>
                 <a:latin typeface="Arial"/>
               </a:rPr>
@@ -10062,7 +10062,7 @@
           </a:solidFill>
           <a:ln>
             <a:solidFill>
-              <a:srgbClr val="E2E8F0"/>
+              <a:srgbClr val="E6E3D8"/>
             </a:solidFill>
           </a:ln>
           <a:effectLst/>
@@ -10115,7 +10115,7 @@
             <a:r>
               <a:rPr sz="2400" b="0">
                 <a:solidFill>
-                  <a:srgbClr val="0F172A"/>
+                  <a:srgbClr val="1F1E1D"/>
                 </a:solidFill>
                 <a:latin typeface="Arial"/>
               </a:rPr>
@@ -10150,7 +10150,7 @@
             <a:r>
               <a:rPr sz="1600" b="1">
                 <a:solidFill>
-                  <a:srgbClr val="0F172A"/>
+                  <a:srgbClr val="1F1E1D"/>
                 </a:solidFill>
                 <a:latin typeface="Arial"/>
               </a:rPr>
@@ -10185,7 +10185,7 @@
             <a:r>
               <a:rPr sz="1250" b="0">
                 <a:solidFill>
-                  <a:srgbClr val="64748B"/>
+                  <a:srgbClr val="75736B"/>
                 </a:solidFill>
                 <a:latin typeface="Arial"/>
               </a:rPr>
@@ -10215,7 +10215,7 @@
           </a:solidFill>
           <a:ln>
             <a:solidFill>
-              <a:srgbClr val="E2E8F0"/>
+              <a:srgbClr val="E6E3D8"/>
             </a:solidFill>
           </a:ln>
           <a:effectLst/>
@@ -10268,7 +10268,7 @@
             <a:r>
               <a:rPr sz="2400" b="0">
                 <a:solidFill>
-                  <a:srgbClr val="0F172A"/>
+                  <a:srgbClr val="1F1E1D"/>
                 </a:solidFill>
                 <a:latin typeface="Arial"/>
               </a:rPr>
@@ -10303,7 +10303,7 @@
             <a:r>
               <a:rPr sz="1600" b="1">
                 <a:solidFill>
-                  <a:srgbClr val="0F172A"/>
+                  <a:srgbClr val="1F1E1D"/>
                 </a:solidFill>
                 <a:latin typeface="Arial"/>
               </a:rPr>
@@ -10338,7 +10338,7 @@
             <a:r>
               <a:rPr sz="1250" b="0">
                 <a:solidFill>
-                  <a:srgbClr val="64748B"/>
+                  <a:srgbClr val="75736B"/>
                 </a:solidFill>
                 <a:latin typeface="Arial"/>
               </a:rPr>
@@ -10368,7 +10368,7 @@
           </a:solidFill>
           <a:ln>
             <a:solidFill>
-              <a:srgbClr val="E2E8F0"/>
+              <a:srgbClr val="E6E3D8"/>
             </a:solidFill>
           </a:ln>
           <a:effectLst/>
@@ -10421,7 +10421,7 @@
             <a:r>
               <a:rPr sz="2400" b="0">
                 <a:solidFill>
-                  <a:srgbClr val="0F172A"/>
+                  <a:srgbClr val="1F1E1D"/>
                 </a:solidFill>
                 <a:latin typeface="Arial"/>
               </a:rPr>
@@ -10456,7 +10456,7 @@
             <a:r>
               <a:rPr sz="1600" b="1">
                 <a:solidFill>
-                  <a:srgbClr val="0F172A"/>
+                  <a:srgbClr val="1F1E1D"/>
                 </a:solidFill>
                 <a:latin typeface="Arial"/>
               </a:rPr>
@@ -10491,7 +10491,7 @@
             <a:r>
               <a:rPr sz="1250" b="0">
                 <a:solidFill>
-                  <a:srgbClr val="64748B"/>
+                  <a:srgbClr val="75736B"/>
                 </a:solidFill>
                 <a:latin typeface="Arial"/>
               </a:rPr>
@@ -10521,7 +10521,7 @@
           </a:solidFill>
           <a:ln>
             <a:solidFill>
-              <a:srgbClr val="E2E8F0"/>
+              <a:srgbClr val="E6E3D8"/>
             </a:solidFill>
           </a:ln>
           <a:effectLst/>
@@ -10574,7 +10574,7 @@
             <a:r>
               <a:rPr sz="2400" b="0">
                 <a:solidFill>
-                  <a:srgbClr val="0F172A"/>
+                  <a:srgbClr val="1F1E1D"/>
                 </a:solidFill>
                 <a:latin typeface="Arial"/>
               </a:rPr>
@@ -10609,7 +10609,7 @@
             <a:r>
               <a:rPr sz="1600" b="1">
                 <a:solidFill>
-                  <a:srgbClr val="0F172A"/>
+                  <a:srgbClr val="1F1E1D"/>
                 </a:solidFill>
                 <a:latin typeface="Arial"/>
               </a:rPr>
@@ -10644,7 +10644,7 @@
             <a:r>
               <a:rPr sz="1250" b="0">
                 <a:solidFill>
-                  <a:srgbClr val="64748B"/>
+                  <a:srgbClr val="75736B"/>
                 </a:solidFill>
                 <a:latin typeface="Arial"/>
               </a:rPr>
@@ -10679,7 +10679,7 @@
             <a:r>
               <a:rPr sz="1100" b="0">
                 <a:solidFill>
-                  <a:srgbClr val="64748B"/>
+                  <a:srgbClr val="75736B"/>
                 </a:solidFill>
                 <a:latin typeface="Arial"/>
               </a:rPr>
@@ -10721,7 +10721,7 @@
             <a:avLst/>
           </a:prstGeom>
           <a:solidFill>
-            <a:srgbClr val="0F766E"/>
+            <a:srgbClr val="C2603E"/>
           </a:solidFill>
           <a:ln>
             <a:noFill/>
@@ -10776,7 +10776,7 @@
             <a:r>
               <a:rPr sz="3000" b="1">
                 <a:solidFill>
-                  <a:srgbClr val="0F172A"/>
+                  <a:srgbClr val="1F1E1D"/>
                 </a:solidFill>
                 <a:latin typeface="Arial"/>
               </a:rPr>
@@ -10811,7 +10811,7 @@
             <a:r>
               <a:rPr sz="1000" b="0">
                 <a:solidFill>
-                  <a:srgbClr val="64748B"/>
+                  <a:srgbClr val="75736B"/>
                 </a:solidFill>
                 <a:latin typeface="Arial"/>
               </a:rPr>
@@ -10861,7 +10861,7 @@
                   </a:txBody>
                   <a:tcPr>
                     <a:solidFill>
-                      <a:srgbClr val="0F766E"/>
+                      <a:srgbClr val="C2603E"/>
                     </a:solidFill>
                   </a:tcPr>
                 </a:tc>
@@ -10883,7 +10883,7 @@
                   </a:txBody>
                   <a:tcPr>
                     <a:solidFill>
-                      <a:srgbClr val="0F766E"/>
+                      <a:srgbClr val="C2603E"/>
                     </a:solidFill>
                   </a:tcPr>
                 </a:tc>
@@ -10897,7 +10897,7 @@
                       <a:r>
                         <a:rPr sz="1600" b="1">
                           <a:solidFill>
-                            <a:srgbClr val="0F172A"/>
+                            <a:srgbClr val="1F1E1D"/>
                           </a:solidFill>
                           <a:latin typeface="Arial"/>
                         </a:rPr>
@@ -10907,7 +10907,7 @@
                   </a:txBody>
                   <a:tcPr>
                     <a:solidFill>
-                      <a:srgbClr val="E6F4F2"/>
+                      <a:srgbClr val="F6E8E1"/>
                     </a:solidFill>
                   </a:tcPr>
                 </a:tc>
@@ -10919,7 +10919,7 @@
                       <a:r>
                         <a:rPr sz="1600" b="0">
                           <a:solidFill>
-                            <a:srgbClr val="0F172A"/>
+                            <a:srgbClr val="1F1E1D"/>
                           </a:solidFill>
                           <a:latin typeface="Arial"/>
                         </a:rPr>
@@ -10929,7 +10929,7 @@
                   </a:txBody>
                   <a:tcPr>
                     <a:solidFill>
-                      <a:srgbClr val="E6F4F2"/>
+                      <a:srgbClr val="F6E8E1"/>
                     </a:solidFill>
                   </a:tcPr>
                 </a:tc>
@@ -10943,7 +10943,7 @@
                       <a:r>
                         <a:rPr sz="1600" b="1">
                           <a:solidFill>
-                            <a:srgbClr val="0F172A"/>
+                            <a:srgbClr val="1F1E1D"/>
                           </a:solidFill>
                           <a:latin typeface="Arial"/>
                         </a:rPr>
@@ -10965,7 +10965,7 @@
                       <a:r>
                         <a:rPr sz="1600" b="0">
                           <a:solidFill>
-                            <a:srgbClr val="0F172A"/>
+                            <a:srgbClr val="1F1E1D"/>
                           </a:solidFill>
                           <a:latin typeface="Arial"/>
                         </a:rPr>
@@ -10989,7 +10989,7 @@
                       <a:r>
                         <a:rPr sz="1600" b="1">
                           <a:solidFill>
-                            <a:srgbClr val="0F172A"/>
+                            <a:srgbClr val="1F1E1D"/>
                           </a:solidFill>
                           <a:latin typeface="Arial"/>
                         </a:rPr>
@@ -10999,7 +10999,7 @@
                   </a:txBody>
                   <a:tcPr>
                     <a:solidFill>
-                      <a:srgbClr val="E6F4F2"/>
+                      <a:srgbClr val="F6E8E1"/>
                     </a:solidFill>
                   </a:tcPr>
                 </a:tc>
@@ -11011,7 +11011,7 @@
                       <a:r>
                         <a:rPr sz="1600" b="0">
                           <a:solidFill>
-                            <a:srgbClr val="0F172A"/>
+                            <a:srgbClr val="1F1E1D"/>
                           </a:solidFill>
                           <a:latin typeface="Arial"/>
                         </a:rPr>
@@ -11021,7 +11021,7 @@
                   </a:txBody>
                   <a:tcPr>
                     <a:solidFill>
-                      <a:srgbClr val="E6F4F2"/>
+                      <a:srgbClr val="F6E8E1"/>
                     </a:solidFill>
                   </a:tcPr>
                 </a:tc>
@@ -11035,7 +11035,7 @@
                       <a:r>
                         <a:rPr sz="1600" b="1">
                           <a:solidFill>
-                            <a:srgbClr val="0F172A"/>
+                            <a:srgbClr val="1F1E1D"/>
                           </a:solidFill>
                           <a:latin typeface="Arial"/>
                         </a:rPr>
@@ -11057,7 +11057,7 @@
                       <a:r>
                         <a:rPr sz="1600" b="0">
                           <a:solidFill>
-                            <a:srgbClr val="0F172A"/>
+                            <a:srgbClr val="1F1E1D"/>
                           </a:solidFill>
                           <a:latin typeface="Arial"/>
                         </a:rPr>
@@ -11081,7 +11081,7 @@
                       <a:r>
                         <a:rPr sz="1600" b="1">
                           <a:solidFill>
-                            <a:srgbClr val="0F172A"/>
+                            <a:srgbClr val="1F1E1D"/>
                           </a:solidFill>
                           <a:latin typeface="Arial"/>
                         </a:rPr>
@@ -11091,7 +11091,7 @@
                   </a:txBody>
                   <a:tcPr>
                     <a:solidFill>
-                      <a:srgbClr val="E6F4F2"/>
+                      <a:srgbClr val="F6E8E1"/>
                     </a:solidFill>
                   </a:tcPr>
                 </a:tc>
@@ -11103,7 +11103,7 @@
                       <a:r>
                         <a:rPr sz="1600" b="0">
                           <a:solidFill>
-                            <a:srgbClr val="0F172A"/>
+                            <a:srgbClr val="1F1E1D"/>
                           </a:solidFill>
                           <a:latin typeface="Arial"/>
                         </a:rPr>
@@ -11113,7 +11113,7 @@
                   </a:txBody>
                   <a:tcPr>
                     <a:solidFill>
-                      <a:srgbClr val="E6F4F2"/>
+                      <a:srgbClr val="F6E8E1"/>
                     </a:solidFill>
                   </a:tcPr>
                 </a:tc>
@@ -11127,7 +11127,7 @@
                       <a:r>
                         <a:rPr sz="1600" b="1">
                           <a:solidFill>
-                            <a:srgbClr val="0F172A"/>
+                            <a:srgbClr val="1F1E1D"/>
                           </a:solidFill>
                           <a:latin typeface="Arial"/>
                         </a:rPr>
@@ -11149,7 +11149,7 @@
                       <a:r>
                         <a:rPr sz="1600" b="0">
                           <a:solidFill>
-                            <a:srgbClr val="0F172A"/>
+                            <a:srgbClr val="1F1E1D"/>
                           </a:solidFill>
                           <a:latin typeface="Arial"/>
                         </a:rPr>
@@ -11173,7 +11173,7 @@
                       <a:r>
                         <a:rPr sz="1600" b="1">
                           <a:solidFill>
-                            <a:srgbClr val="0F172A"/>
+                            <a:srgbClr val="1F1E1D"/>
                           </a:solidFill>
                           <a:latin typeface="Arial"/>
                         </a:rPr>
@@ -11183,7 +11183,7 @@
                   </a:txBody>
                   <a:tcPr>
                     <a:solidFill>
-                      <a:srgbClr val="E6F4F2"/>
+                      <a:srgbClr val="F6E8E1"/>
                     </a:solidFill>
                   </a:tcPr>
                 </a:tc>
@@ -11195,7 +11195,7 @@
                       <a:r>
                         <a:rPr sz="1600" b="0">
                           <a:solidFill>
-                            <a:srgbClr val="0F172A"/>
+                            <a:srgbClr val="1F1E1D"/>
                           </a:solidFill>
                           <a:latin typeface="Arial"/>
                         </a:rPr>
@@ -11205,7 +11205,7 @@
                   </a:txBody>
                   <a:tcPr>
                     <a:solidFill>
-                      <a:srgbClr val="E6F4F2"/>
+                      <a:srgbClr val="F6E8E1"/>
                     </a:solidFill>
                   </a:tcPr>
                 </a:tc>
@@ -11247,7 +11247,7 @@
             <a:avLst/>
           </a:prstGeom>
           <a:solidFill>
-            <a:srgbClr val="0F766E"/>
+            <a:srgbClr val="C2603E"/>
           </a:solidFill>
           <a:ln>
             <a:noFill/>
@@ -11302,7 +11302,7 @@
             <a:r>
               <a:rPr sz="3000" b="1">
                 <a:solidFill>
-                  <a:srgbClr val="0F172A"/>
+                  <a:srgbClr val="1F1E1D"/>
                 </a:solidFill>
                 <a:latin typeface="Arial"/>
               </a:rPr>
@@ -11337,7 +11337,7 @@
             <a:r>
               <a:rPr sz="1000" b="0">
                 <a:solidFill>
-                  <a:srgbClr val="64748B"/>
+                  <a:srgbClr val="75736B"/>
                 </a:solidFill>
                 <a:latin typeface="Arial"/>
               </a:rPr>
@@ -11354,7 +11354,7 @@
         </p:nvSpPr>
         <p:spPr>
           <a:xfrm>
-            <a:off x="548640" y="1417320"/>
+            <a:off x="548640" y="1325880"/>
             <a:ext cx="2377440" cy="594360"/>
           </a:xfrm>
           <a:prstGeom prst="roundRect">
@@ -11363,7 +11363,7 @@
             </a:avLst>
           </a:prstGeom>
           <a:solidFill>
-            <a:srgbClr val="0F766E"/>
+            <a:srgbClr val="C2603E"/>
           </a:solidFill>
           <a:ln>
             <a:noFill/>
@@ -11400,7 +11400,7 @@
         </p:nvSpPr>
         <p:spPr>
           <a:xfrm>
-            <a:off x="548640" y="1417320"/>
+            <a:off x="548640" y="1325880"/>
             <a:ext cx="2377440" cy="594360"/>
           </a:xfrm>
           <a:prstGeom prst="rect">
@@ -11435,7 +11435,7 @@
         </p:nvSpPr>
         <p:spPr>
           <a:xfrm>
-            <a:off x="3108960" y="1417320"/>
+            <a:off x="3108960" y="1325880"/>
             <a:ext cx="8503920" cy="594360"/>
           </a:xfrm>
           <a:prstGeom prst="rect">
@@ -11453,7 +11453,7 @@
             <a:r>
               <a:rPr sz="1700" b="0">
                 <a:solidFill>
-                  <a:srgbClr val="0F172A"/>
+                  <a:srgbClr val="1F1E1D"/>
                 </a:solidFill>
                 <a:latin typeface="Arial"/>
               </a:rPr>
@@ -11470,7 +11470,7 @@
         </p:nvSpPr>
         <p:spPr>
           <a:xfrm>
-            <a:off x="548640" y="2194560"/>
+            <a:off x="548640" y="2039112"/>
             <a:ext cx="2377440" cy="594360"/>
           </a:xfrm>
           <a:prstGeom prst="roundRect">
@@ -11479,7 +11479,7 @@
             </a:avLst>
           </a:prstGeom>
           <a:solidFill>
-            <a:srgbClr val="0F766E"/>
+            <a:srgbClr val="C2603E"/>
           </a:solidFill>
           <a:ln>
             <a:noFill/>
@@ -11516,7 +11516,7 @@
         </p:nvSpPr>
         <p:spPr>
           <a:xfrm>
-            <a:off x="548640" y="2194560"/>
+            <a:off x="548640" y="2039112"/>
             <a:ext cx="2377440" cy="594360"/>
           </a:xfrm>
           <a:prstGeom prst="rect">
@@ -11551,7 +11551,7 @@
         </p:nvSpPr>
         <p:spPr>
           <a:xfrm>
-            <a:off x="3108960" y="2194560"/>
+            <a:off x="3108960" y="2039112"/>
             <a:ext cx="8503920" cy="594360"/>
           </a:xfrm>
           <a:prstGeom prst="rect">
@@ -11569,7 +11569,7 @@
             <a:r>
               <a:rPr sz="1700" b="0">
                 <a:solidFill>
-                  <a:srgbClr val="0F172A"/>
+                  <a:srgbClr val="1F1E1D"/>
                 </a:solidFill>
                 <a:latin typeface="Arial"/>
               </a:rPr>
@@ -11586,7 +11586,7 @@
         </p:nvSpPr>
         <p:spPr>
           <a:xfrm>
-            <a:off x="548640" y="2971800"/>
+            <a:off x="548640" y="2752344"/>
             <a:ext cx="2377440" cy="594360"/>
           </a:xfrm>
           <a:prstGeom prst="roundRect">
@@ -11595,7 +11595,7 @@
             </a:avLst>
           </a:prstGeom>
           <a:solidFill>
-            <a:srgbClr val="0F766E"/>
+            <a:srgbClr val="C2603E"/>
           </a:solidFill>
           <a:ln>
             <a:noFill/>
@@ -11632,7 +11632,7 @@
         </p:nvSpPr>
         <p:spPr>
           <a:xfrm>
-            <a:off x="548640" y="2971800"/>
+            <a:off x="548640" y="2752344"/>
             <a:ext cx="2377440" cy="594360"/>
           </a:xfrm>
           <a:prstGeom prst="rect">
@@ -11667,7 +11667,7 @@
         </p:nvSpPr>
         <p:spPr>
           <a:xfrm>
-            <a:off x="3108960" y="2971800"/>
+            <a:off x="3108960" y="2752344"/>
             <a:ext cx="8503920" cy="594360"/>
           </a:xfrm>
           <a:prstGeom prst="rect">
@@ -11685,7 +11685,7 @@
             <a:r>
               <a:rPr sz="1700" b="0">
                 <a:solidFill>
-                  <a:srgbClr val="0F172A"/>
+                  <a:srgbClr val="1F1E1D"/>
                 </a:solidFill>
                 <a:latin typeface="Arial"/>
               </a:rPr>
@@ -11702,7 +11702,7 @@
         </p:nvSpPr>
         <p:spPr>
           <a:xfrm>
-            <a:off x="548640" y="3749040"/>
+            <a:off x="548640" y="3465576"/>
             <a:ext cx="2377440" cy="594360"/>
           </a:xfrm>
           <a:prstGeom prst="roundRect">
@@ -11711,7 +11711,7 @@
             </a:avLst>
           </a:prstGeom>
           <a:solidFill>
-            <a:srgbClr val="0F766E"/>
+            <a:srgbClr val="C2603E"/>
           </a:solidFill>
           <a:ln>
             <a:noFill/>
@@ -11748,7 +11748,7 @@
         </p:nvSpPr>
         <p:spPr>
           <a:xfrm>
-            <a:off x="548640" y="3749040"/>
+            <a:off x="548640" y="3465576"/>
             <a:ext cx="2377440" cy="594360"/>
           </a:xfrm>
           <a:prstGeom prst="rect">
@@ -11783,7 +11783,7 @@
         </p:nvSpPr>
         <p:spPr>
           <a:xfrm>
-            <a:off x="3108960" y="3749040"/>
+            <a:off x="3108960" y="3465576"/>
             <a:ext cx="8503920" cy="594360"/>
           </a:xfrm>
           <a:prstGeom prst="rect">
@@ -11801,7 +11801,7 @@
             <a:r>
               <a:rPr sz="1700" b="0">
                 <a:solidFill>
-                  <a:srgbClr val="0F172A"/>
+                  <a:srgbClr val="1F1E1D"/>
                 </a:solidFill>
                 <a:latin typeface="Arial"/>
               </a:rPr>
@@ -11818,7 +11818,7 @@
         </p:nvSpPr>
         <p:spPr>
           <a:xfrm>
-            <a:off x="548640" y="4526280"/>
+            <a:off x="548640" y="4178808"/>
             <a:ext cx="2377440" cy="594360"/>
           </a:xfrm>
           <a:prstGeom prst="roundRect">
@@ -11827,7 +11827,7 @@
             </a:avLst>
           </a:prstGeom>
           <a:solidFill>
-            <a:srgbClr val="0F766E"/>
+            <a:srgbClr val="C2603E"/>
           </a:solidFill>
           <a:ln>
             <a:noFill/>
@@ -11864,7 +11864,7 @@
         </p:nvSpPr>
         <p:spPr>
           <a:xfrm>
-            <a:off x="548640" y="4526280"/>
+            <a:off x="548640" y="4178808"/>
             <a:ext cx="2377440" cy="594360"/>
           </a:xfrm>
           <a:prstGeom prst="rect">
@@ -11899,7 +11899,7 @@
         </p:nvSpPr>
         <p:spPr>
           <a:xfrm>
-            <a:off x="3108960" y="4526280"/>
+            <a:off x="3108960" y="4178808"/>
             <a:ext cx="8503920" cy="594360"/>
           </a:xfrm>
           <a:prstGeom prst="rect">
@@ -11917,7 +11917,7 @@
             <a:r>
               <a:rPr sz="1700" b="0">
                 <a:solidFill>
-                  <a:srgbClr val="0F172A"/>
+                  <a:srgbClr val="1F1E1D"/>
                 </a:solidFill>
                 <a:latin typeface="Arial"/>
               </a:rPr>
@@ -11934,7 +11934,7 @@
         </p:nvSpPr>
         <p:spPr>
           <a:xfrm>
-            <a:off x="548640" y="5303520"/>
+            <a:off x="548640" y="4892040"/>
             <a:ext cx="2377440" cy="594360"/>
           </a:xfrm>
           <a:prstGeom prst="roundRect">
@@ -11943,7 +11943,7 @@
             </a:avLst>
           </a:prstGeom>
           <a:solidFill>
-            <a:srgbClr val="0F766E"/>
+            <a:srgbClr val="C2603E"/>
           </a:solidFill>
           <a:ln>
             <a:noFill/>
@@ -11980,7 +11980,7 @@
         </p:nvSpPr>
         <p:spPr>
           <a:xfrm>
-            <a:off x="548640" y="5303520"/>
+            <a:off x="548640" y="4892040"/>
             <a:ext cx="2377440" cy="594360"/>
           </a:xfrm>
           <a:prstGeom prst="rect">
@@ -12015,7 +12015,7 @@
         </p:nvSpPr>
         <p:spPr>
           <a:xfrm>
-            <a:off x="3108960" y="5303520"/>
+            <a:off x="3108960" y="4892040"/>
             <a:ext cx="8503920" cy="594360"/>
           </a:xfrm>
           <a:prstGeom prst="rect">
@@ -12033,11 +12033,127 @@
             <a:r>
               <a:rPr sz="1700" b="0">
                 <a:solidFill>
-                  <a:srgbClr val="0F172A"/>
+                  <a:srgbClr val="1F1E1D"/>
                 </a:solidFill>
                 <a:latin typeface="Arial"/>
               </a:rPr>
               <a:t>HTML/CSS/JS (адаптивный, тёмная тема), Telegram — aiogram 3</a:t>
+            </a:r>
+          </a:p>
+        </p:txBody>
+      </p:sp>
+      <p:sp>
+        <p:nvSpPr>
+          <p:cNvPr id="23" name="Rounded Rectangle 22"/>
+          <p:cNvSpPr/>
+          <p:nvPr/>
+        </p:nvSpPr>
+        <p:spPr>
+          <a:xfrm>
+            <a:off x="548640" y="5605272"/>
+            <a:ext cx="2377440" cy="594360"/>
+          </a:xfrm>
+          <a:prstGeom prst="roundRect">
+            <a:avLst>
+              <a:gd name="adj" fmla="val 8000"/>
+            </a:avLst>
+          </a:prstGeom>
+          <a:solidFill>
+            <a:srgbClr val="C2603E"/>
+          </a:solidFill>
+          <a:ln>
+            <a:noFill/>
+          </a:ln>
+          <a:effectLst/>
+        </p:spPr>
+        <p:style>
+          <a:lnRef idx="1">
+            <a:schemeClr val="accent1"/>
+          </a:lnRef>
+          <a:fillRef idx="3">
+            <a:schemeClr val="accent1"/>
+          </a:fillRef>
+          <a:effectRef idx="2">
+            <a:schemeClr val="accent1"/>
+          </a:effectRef>
+          <a:fontRef idx="minor">
+            <a:schemeClr val="lt1"/>
+          </a:fontRef>
+        </p:style>
+        <p:txBody>
+          <a:bodyPr rtlCol="0" anchor="ctr"/>
+          <a:lstStyle/>
+          <a:p>
+            <a:pPr algn="ctr"/>
+          </a:p>
+        </p:txBody>
+      </p:sp>
+      <p:sp>
+        <p:nvSpPr>
+          <p:cNvPr id="24" name="TextBox 23"/>
+          <p:cNvSpPr txBox="1"/>
+          <p:nvPr/>
+        </p:nvSpPr>
+        <p:spPr>
+          <a:xfrm>
+            <a:off x="548640" y="5605272"/>
+            <a:ext cx="2377440" cy="594360"/>
+          </a:xfrm>
+          <a:prstGeom prst="rect">
+            <a:avLst/>
+          </a:prstGeom>
+          <a:noFill/>
+        </p:spPr>
+        <p:txBody>
+          <a:bodyPr wrap="square" anchor="ctr" lIns="45720" rIns="45720">
+            <a:spAutoFit/>
+          </a:bodyPr>
+          <a:lstStyle/>
+          <a:p>
+            <a:pPr algn="ctr"/>
+            <a:r>
+              <a:rPr sz="1600" b="1">
+                <a:solidFill>
+                  <a:srgbClr val="FFFFFF"/>
+                </a:solidFill>
+                <a:latin typeface="Arial"/>
+              </a:rPr>
+              <a:t>Безопасность</a:t>
+            </a:r>
+          </a:p>
+        </p:txBody>
+      </p:sp>
+      <p:sp>
+        <p:nvSpPr>
+          <p:cNvPr id="25" name="TextBox 24"/>
+          <p:cNvSpPr txBox="1"/>
+          <p:nvPr/>
+        </p:nvSpPr>
+        <p:spPr>
+          <a:xfrm>
+            <a:off x="3108960" y="5605272"/>
+            <a:ext cx="8503920" cy="594360"/>
+          </a:xfrm>
+          <a:prstGeom prst="rect">
+            <a:avLst/>
+          </a:prstGeom>
+          <a:noFill/>
+        </p:spPr>
+        <p:txBody>
+          <a:bodyPr wrap="square" anchor="ctr" lIns="45720" rIns="45720">
+            <a:spAutoFit/>
+          </a:bodyPr>
+          <a:lstStyle/>
+          <a:p>
+            <a:pPr algn="l"/>
+            <a:r>
+              <a:rPr sz="1700" b="0">
+                <a:solidFill>
+                  <a:srgbClr val="1F1E1D"/>
+                </a:solidFill>
+                <a:latin typeface="Arial"/>
+              </a:rPr>
+              <a:t>Вход по логину/паролю: хэши PBKDF2, HttpOnly-cookie, изоляция документов</a:t>
             </a:r>
           </a:p>
         </p:txBody>

--- a/docs/DocMind_AI_Presentation.pptx
+++ b/docs/DocMind_AI_Presentation.pptx
@@ -4095,7 +4095,7 @@
             <a:avLst/>
           </a:prstGeom>
           <a:solidFill>
-            <a:srgbClr val="C2603E"/>
+            <a:srgbClr val="0F1B2D"/>
           </a:solidFill>
           <a:ln>
             <a:noFill/>
@@ -4150,7 +4150,7 @@
             <a:r>
               <a:rPr sz="1600" b="1">
                 <a:solidFill>
-                  <a:srgbClr val="F6E8E1"/>
+                  <a:srgbClr val="E3A813"/>
                 </a:solidFill>
                 <a:latin typeface="Arial"/>
               </a:rPr>
@@ -4313,7 +4313,7 @@
           </a:prstGeom>
           <a:ln>
             <a:solidFill>
-              <a:srgbClr val="E6E3D8"/>
+              <a:srgbClr val="DBE3EC"/>
             </a:solidFill>
           </a:ln>
         </p:spPr>
@@ -4351,7 +4351,7 @@
             <a:avLst/>
           </a:prstGeom>
           <a:solidFill>
-            <a:srgbClr val="C2603E"/>
+            <a:srgbClr val="0089A8"/>
           </a:solidFill>
           <a:ln>
             <a:noFill/>
@@ -4406,7 +4406,7 @@
             <a:r>
               <a:rPr sz="3000" b="1">
                 <a:solidFill>
-                  <a:srgbClr val="1F1E1D"/>
+                  <a:srgbClr val="0F1B2D"/>
                 </a:solidFill>
                 <a:latin typeface="Arial"/>
               </a:rPr>
@@ -4441,7 +4441,7 @@
             <a:r>
               <a:rPr sz="1000" b="0">
                 <a:solidFill>
-                  <a:srgbClr val="75736B"/>
+                  <a:srgbClr val="56667B"/>
                 </a:solidFill>
                 <a:latin typeface="Arial"/>
               </a:rPr>
@@ -4474,7 +4474,7 @@
           </a:prstGeom>
           <a:ln>
             <a:solidFill>
-              <a:srgbClr val="E6E3D8"/>
+              <a:srgbClr val="DBE3EC"/>
             </a:solidFill>
           </a:ln>
         </p:spPr>
@@ -4509,7 +4509,7 @@
             <a:r>
               <a:rPr sz="1500" b="1">
                 <a:solidFill>
-                  <a:srgbClr val="1F1E1D"/>
+                  <a:srgbClr val="0F1B2D"/>
                 </a:solidFill>
                 <a:latin typeface="Arial"/>
               </a:rPr>
@@ -4518,7 +4518,7 @@
             <a:r>
               <a:rPr sz="1500">
                 <a:solidFill>
-                  <a:srgbClr val="75736B"/>
+                  <a:srgbClr val="56667B"/>
                 </a:solidFill>
                 <a:latin typeface="Arial"/>
               </a:rPr>
@@ -4534,7 +4534,7 @@
             <a:r>
               <a:rPr sz="1500" b="1">
                 <a:solidFill>
-                  <a:srgbClr val="1F1E1D"/>
+                  <a:srgbClr val="0F1B2D"/>
                 </a:solidFill>
                 <a:latin typeface="Arial"/>
               </a:rPr>
@@ -4543,7 +4543,7 @@
             <a:r>
               <a:rPr sz="1500">
                 <a:solidFill>
-                  <a:srgbClr val="75736B"/>
+                  <a:srgbClr val="56667B"/>
                 </a:solidFill>
                 <a:latin typeface="Arial"/>
               </a:rPr>
@@ -4559,7 +4559,7 @@
             <a:r>
               <a:rPr sz="1500" b="1">
                 <a:solidFill>
-                  <a:srgbClr val="1F1E1D"/>
+                  <a:srgbClr val="0F1B2D"/>
                 </a:solidFill>
                 <a:latin typeface="Arial"/>
               </a:rPr>
@@ -4568,7 +4568,7 @@
             <a:r>
               <a:rPr sz="1500">
                 <a:solidFill>
-                  <a:srgbClr val="75736B"/>
+                  <a:srgbClr val="56667B"/>
                 </a:solidFill>
                 <a:latin typeface="Arial"/>
               </a:rPr>
@@ -4584,7 +4584,7 @@
             <a:r>
               <a:rPr sz="1500" b="1">
                 <a:solidFill>
-                  <a:srgbClr val="1F1E1D"/>
+                  <a:srgbClr val="0F1B2D"/>
                 </a:solidFill>
                 <a:latin typeface="Arial"/>
               </a:rPr>
@@ -4593,7 +4593,7 @@
             <a:r>
               <a:rPr sz="1500">
                 <a:solidFill>
-                  <a:srgbClr val="75736B"/>
+                  <a:srgbClr val="56667B"/>
                 </a:solidFill>
                 <a:latin typeface="Arial"/>
               </a:rPr>
@@ -4635,7 +4635,7 @@
             <a:avLst/>
           </a:prstGeom>
           <a:solidFill>
-            <a:srgbClr val="C2603E"/>
+            <a:srgbClr val="0089A8"/>
           </a:solidFill>
           <a:ln>
             <a:noFill/>
@@ -4690,7 +4690,7 @@
             <a:r>
               <a:rPr sz="3000" b="1">
                 <a:solidFill>
-                  <a:srgbClr val="1F1E1D"/>
+                  <a:srgbClr val="0F1B2D"/>
                 </a:solidFill>
                 <a:latin typeface="Arial"/>
               </a:rPr>
@@ -4725,7 +4725,7 @@
             <a:r>
               <a:rPr sz="1000" b="0">
                 <a:solidFill>
-                  <a:srgbClr val="75736B"/>
+                  <a:srgbClr val="56667B"/>
                 </a:solidFill>
                 <a:latin typeface="Arial"/>
               </a:rPr>
@@ -4755,7 +4755,7 @@
           </a:solidFill>
           <a:ln>
             <a:solidFill>
-              <a:srgbClr val="E6E3D8"/>
+              <a:srgbClr val="DBE3EC"/>
             </a:solidFill>
           </a:ln>
           <a:effectLst/>
@@ -4808,7 +4808,7 @@
             <a:r>
               <a:rPr sz="2400" b="0">
                 <a:solidFill>
-                  <a:srgbClr val="1F1E1D"/>
+                  <a:srgbClr val="0F1B2D"/>
                 </a:solidFill>
                 <a:latin typeface="Arial"/>
               </a:rPr>
@@ -4843,7 +4843,7 @@
             <a:r>
               <a:rPr sz="1700" b="1">
                 <a:solidFill>
-                  <a:srgbClr val="1F1E1D"/>
+                  <a:srgbClr val="0F1B2D"/>
                 </a:solidFill>
                 <a:latin typeface="Arial"/>
               </a:rPr>
@@ -4878,7 +4878,7 @@
             <a:r>
               <a:rPr sz="1500" b="0">
                 <a:solidFill>
-                  <a:srgbClr val="75736B"/>
+                  <a:srgbClr val="56667B"/>
                 </a:solidFill>
                 <a:latin typeface="Arial"/>
               </a:rPr>
@@ -4908,7 +4908,7 @@
           </a:solidFill>
           <a:ln>
             <a:solidFill>
-              <a:srgbClr val="E6E3D8"/>
+              <a:srgbClr val="DBE3EC"/>
             </a:solidFill>
           </a:ln>
           <a:effectLst/>
@@ -4961,7 +4961,7 @@
             <a:r>
               <a:rPr sz="2400" b="0">
                 <a:solidFill>
-                  <a:srgbClr val="1F1E1D"/>
+                  <a:srgbClr val="0F1B2D"/>
                 </a:solidFill>
                 <a:latin typeface="Arial"/>
               </a:rPr>
@@ -4996,7 +4996,7 @@
             <a:r>
               <a:rPr sz="1700" b="1">
                 <a:solidFill>
-                  <a:srgbClr val="1F1E1D"/>
+                  <a:srgbClr val="0F1B2D"/>
                 </a:solidFill>
                 <a:latin typeface="Arial"/>
               </a:rPr>
@@ -5031,7 +5031,7 @@
             <a:r>
               <a:rPr sz="1500" b="0">
                 <a:solidFill>
-                  <a:srgbClr val="75736B"/>
+                  <a:srgbClr val="56667B"/>
                 </a:solidFill>
                 <a:latin typeface="Arial"/>
               </a:rPr>
@@ -5061,7 +5061,7 @@
           </a:solidFill>
           <a:ln>
             <a:solidFill>
-              <a:srgbClr val="E6E3D8"/>
+              <a:srgbClr val="DBE3EC"/>
             </a:solidFill>
           </a:ln>
           <a:effectLst/>
@@ -5114,7 +5114,7 @@
             <a:r>
               <a:rPr sz="2400" b="0">
                 <a:solidFill>
-                  <a:srgbClr val="1F1E1D"/>
+                  <a:srgbClr val="0F1B2D"/>
                 </a:solidFill>
                 <a:latin typeface="Arial"/>
               </a:rPr>
@@ -5149,7 +5149,7 @@
             <a:r>
               <a:rPr sz="1700" b="1">
                 <a:solidFill>
-                  <a:srgbClr val="1F1E1D"/>
+                  <a:srgbClr val="0F1B2D"/>
                 </a:solidFill>
                 <a:latin typeface="Arial"/>
               </a:rPr>
@@ -5184,7 +5184,7 @@
             <a:r>
               <a:rPr sz="1500" b="0">
                 <a:solidFill>
-                  <a:srgbClr val="75736B"/>
+                  <a:srgbClr val="56667B"/>
                 </a:solidFill>
                 <a:latin typeface="Arial"/>
               </a:rPr>
@@ -5214,7 +5214,7 @@
           </a:solidFill>
           <a:ln>
             <a:solidFill>
-              <a:srgbClr val="E6E3D8"/>
+              <a:srgbClr val="DBE3EC"/>
             </a:solidFill>
           </a:ln>
           <a:effectLst/>
@@ -5267,7 +5267,7 @@
             <a:r>
               <a:rPr sz="2400" b="0">
                 <a:solidFill>
-                  <a:srgbClr val="1F1E1D"/>
+                  <a:srgbClr val="0F1B2D"/>
                 </a:solidFill>
                 <a:latin typeface="Arial"/>
               </a:rPr>
@@ -5302,7 +5302,7 @@
             <a:r>
               <a:rPr sz="1700" b="1">
                 <a:solidFill>
-                  <a:srgbClr val="1F1E1D"/>
+                  <a:srgbClr val="0F1B2D"/>
                 </a:solidFill>
                 <a:latin typeface="Arial"/>
               </a:rPr>
@@ -5337,7 +5337,7 @@
             <a:r>
               <a:rPr sz="1500" b="0">
                 <a:solidFill>
-                  <a:srgbClr val="75736B"/>
+                  <a:srgbClr val="56667B"/>
                 </a:solidFill>
                 <a:latin typeface="Arial"/>
               </a:rPr>
@@ -5379,7 +5379,7 @@
             <a:avLst/>
           </a:prstGeom>
           <a:solidFill>
-            <a:srgbClr val="C2603E"/>
+            <a:srgbClr val="0089A8"/>
           </a:solidFill>
           <a:ln>
             <a:noFill/>
@@ -5434,7 +5434,7 @@
             <a:r>
               <a:rPr sz="3000" b="1">
                 <a:solidFill>
-                  <a:srgbClr val="1F1E1D"/>
+                  <a:srgbClr val="0F1B2D"/>
                 </a:solidFill>
                 <a:latin typeface="Arial"/>
               </a:rPr>
@@ -5469,7 +5469,7 @@
             <a:r>
               <a:rPr sz="1000" b="0">
                 <a:solidFill>
-                  <a:srgbClr val="75736B"/>
+                  <a:srgbClr val="56667B"/>
                 </a:solidFill>
                 <a:latin typeface="Arial"/>
               </a:rPr>
@@ -5504,7 +5504,7 @@
             <a:r>
               <a:rPr sz="2000" b="1">
                 <a:solidFill>
-                  <a:srgbClr val="C2603E"/>
+                  <a:srgbClr val="0089A8"/>
                 </a:solidFill>
                 <a:latin typeface="Arial"/>
               </a:rPr>
@@ -5543,7 +5543,7 @@
             <a:r>
               <a:rPr sz="1600" b="1">
                 <a:solidFill>
-                  <a:srgbClr val="1F1E1D"/>
+                  <a:srgbClr val="0F1B2D"/>
                 </a:solidFill>
                 <a:latin typeface="Arial"/>
               </a:rPr>
@@ -5552,7 +5552,7 @@
             <a:r>
               <a:rPr sz="1600">
                 <a:solidFill>
-                  <a:srgbClr val="75736B"/>
+                  <a:srgbClr val="56667B"/>
                 </a:solidFill>
                 <a:latin typeface="Arial"/>
               </a:rPr>
@@ -5568,7 +5568,7 @@
             <a:r>
               <a:rPr sz="1600" b="1">
                 <a:solidFill>
-                  <a:srgbClr val="1F1E1D"/>
+                  <a:srgbClr val="0F1B2D"/>
                 </a:solidFill>
                 <a:latin typeface="Arial"/>
               </a:rPr>
@@ -5577,7 +5577,7 @@
             <a:r>
               <a:rPr sz="1600">
                 <a:solidFill>
-                  <a:srgbClr val="75736B"/>
+                  <a:srgbClr val="56667B"/>
                 </a:solidFill>
                 <a:latin typeface="Arial"/>
               </a:rPr>
@@ -5593,7 +5593,7 @@
             <a:r>
               <a:rPr sz="1600" b="1">
                 <a:solidFill>
-                  <a:srgbClr val="1F1E1D"/>
+                  <a:srgbClr val="0F1B2D"/>
                 </a:solidFill>
                 <a:latin typeface="Arial"/>
               </a:rPr>
@@ -5602,7 +5602,7 @@
             <a:r>
               <a:rPr sz="1600">
                 <a:solidFill>
-                  <a:srgbClr val="75736B"/>
+                  <a:srgbClr val="56667B"/>
                 </a:solidFill>
                 <a:latin typeface="Arial"/>
               </a:rPr>
@@ -5618,7 +5618,7 @@
             <a:r>
               <a:rPr sz="1600" b="1">
                 <a:solidFill>
-                  <a:srgbClr val="1F1E1D"/>
+                  <a:srgbClr val="0F1B2D"/>
                 </a:solidFill>
                 <a:latin typeface="Arial"/>
               </a:rPr>
@@ -5627,7 +5627,7 @@
             <a:r>
               <a:rPr sz="1600">
                 <a:solidFill>
-                  <a:srgbClr val="75736B"/>
+                  <a:srgbClr val="56667B"/>
                 </a:solidFill>
                 <a:latin typeface="Arial"/>
               </a:rPr>
@@ -5643,7 +5643,7 @@
             <a:r>
               <a:rPr sz="1600" b="1">
                 <a:solidFill>
-                  <a:srgbClr val="1F1E1D"/>
+                  <a:srgbClr val="0F1B2D"/>
                 </a:solidFill>
                 <a:latin typeface="Arial"/>
               </a:rPr>
@@ -5652,7 +5652,7 @@
             <a:r>
               <a:rPr sz="1600">
                 <a:solidFill>
-                  <a:srgbClr val="75736B"/>
+                  <a:srgbClr val="56667B"/>
                 </a:solidFill>
                 <a:latin typeface="Arial"/>
               </a:rPr>
@@ -5668,7 +5668,7 @@
             <a:r>
               <a:rPr sz="1600" b="1">
                 <a:solidFill>
-                  <a:srgbClr val="1F1E1D"/>
+                  <a:srgbClr val="0F1B2D"/>
                 </a:solidFill>
                 <a:latin typeface="Arial"/>
               </a:rPr>
@@ -5677,7 +5677,7 @@
             <a:r>
               <a:rPr sz="1600">
                 <a:solidFill>
-                  <a:srgbClr val="75736B"/>
+                  <a:srgbClr val="56667B"/>
                 </a:solidFill>
                 <a:latin typeface="Arial"/>
               </a:rPr>
@@ -5712,7 +5712,7 @@
             <a:r>
               <a:rPr sz="2000" b="1">
                 <a:solidFill>
-                  <a:srgbClr val="C2603E"/>
+                  <a:srgbClr val="0089A8"/>
                 </a:solidFill>
                 <a:latin typeface="Arial"/>
               </a:rPr>
@@ -5751,7 +5751,7 @@
             <a:r>
               <a:rPr sz="1600" b="0">
                 <a:solidFill>
-                  <a:srgbClr val="1F1E1D"/>
+                  <a:srgbClr val="0F1B2D"/>
                 </a:solidFill>
                 <a:latin typeface="Arial"/>
               </a:rPr>
@@ -5767,7 +5767,7 @@
             <a:r>
               <a:rPr sz="1600" b="0">
                 <a:solidFill>
-                  <a:srgbClr val="1F1E1D"/>
+                  <a:srgbClr val="0F1B2D"/>
                 </a:solidFill>
                 <a:latin typeface="Arial"/>
               </a:rPr>
@@ -5783,7 +5783,7 @@
             <a:r>
               <a:rPr sz="1600" b="0">
                 <a:solidFill>
-                  <a:srgbClr val="1F1E1D"/>
+                  <a:srgbClr val="0F1B2D"/>
                 </a:solidFill>
                 <a:latin typeface="Arial"/>
               </a:rPr>
@@ -5799,7 +5799,7 @@
             <a:r>
               <a:rPr sz="1600" b="0">
                 <a:solidFill>
-                  <a:srgbClr val="1F1E1D"/>
+                  <a:srgbClr val="0F1B2D"/>
                 </a:solidFill>
                 <a:latin typeface="Arial"/>
               </a:rPr>
@@ -5815,7 +5815,7 @@
             <a:r>
               <a:rPr sz="1600" b="0">
                 <a:solidFill>
-                  <a:srgbClr val="1F1E1D"/>
+                  <a:srgbClr val="0F1B2D"/>
                 </a:solidFill>
                 <a:latin typeface="Arial"/>
               </a:rPr>
@@ -5857,7 +5857,7 @@
             <a:avLst/>
           </a:prstGeom>
           <a:solidFill>
-            <a:srgbClr val="C2603E"/>
+            <a:srgbClr val="0F1B2D"/>
           </a:solidFill>
           <a:ln>
             <a:noFill/>
@@ -5982,7 +5982,7 @@
             <a:r>
               <a:rPr sz="1800" b="0">
                 <a:solidFill>
-                  <a:srgbClr val="F6E8E1"/>
+                  <a:srgbClr val="E3A813"/>
                 </a:solidFill>
                 <a:latin typeface="Arial"/>
               </a:rPr>
@@ -6024,7 +6024,7 @@
             <a:avLst/>
           </a:prstGeom>
           <a:solidFill>
-            <a:srgbClr val="C2603E"/>
+            <a:srgbClr val="0089A8"/>
           </a:solidFill>
           <a:ln>
             <a:noFill/>
@@ -6079,7 +6079,7 @@
             <a:r>
               <a:rPr sz="3000" b="1">
                 <a:solidFill>
-                  <a:srgbClr val="1F1E1D"/>
+                  <a:srgbClr val="0F1B2D"/>
                 </a:solidFill>
                 <a:latin typeface="Arial"/>
               </a:rPr>
@@ -6114,7 +6114,7 @@
             <a:r>
               <a:rPr sz="1000" b="0">
                 <a:solidFill>
-                  <a:srgbClr val="75736B"/>
+                  <a:srgbClr val="56667B"/>
                 </a:solidFill>
                 <a:latin typeface="Arial"/>
               </a:rPr>
@@ -6144,7 +6144,7 @@
           </a:solidFill>
           <a:ln>
             <a:solidFill>
-              <a:srgbClr val="E6E3D8"/>
+              <a:srgbClr val="DBE3EC"/>
             </a:solidFill>
           </a:ln>
           <a:effectLst/>
@@ -6197,7 +6197,7 @@
             <a:r>
               <a:rPr sz="2400" b="0">
                 <a:solidFill>
-                  <a:srgbClr val="1F1E1D"/>
+                  <a:srgbClr val="0F1B2D"/>
                 </a:solidFill>
                 <a:latin typeface="Arial"/>
               </a:rPr>
@@ -6232,7 +6232,7 @@
             <a:r>
               <a:rPr sz="1700" b="1">
                 <a:solidFill>
-                  <a:srgbClr val="1F1E1D"/>
+                  <a:srgbClr val="0F1B2D"/>
                 </a:solidFill>
                 <a:latin typeface="Arial"/>
               </a:rPr>
@@ -6267,7 +6267,7 @@
             <a:r>
               <a:rPr sz="1300" b="0">
                 <a:solidFill>
-                  <a:srgbClr val="75736B"/>
+                  <a:srgbClr val="56667B"/>
                 </a:solidFill>
                 <a:latin typeface="Arial"/>
               </a:rPr>
@@ -6297,7 +6297,7 @@
           </a:solidFill>
           <a:ln>
             <a:solidFill>
-              <a:srgbClr val="E6E3D8"/>
+              <a:srgbClr val="DBE3EC"/>
             </a:solidFill>
           </a:ln>
           <a:effectLst/>
@@ -6350,7 +6350,7 @@
             <a:r>
               <a:rPr sz="2400" b="0">
                 <a:solidFill>
-                  <a:srgbClr val="1F1E1D"/>
+                  <a:srgbClr val="0F1B2D"/>
                 </a:solidFill>
                 <a:latin typeface="Arial"/>
               </a:rPr>
@@ -6385,7 +6385,7 @@
             <a:r>
               <a:rPr sz="1700" b="1">
                 <a:solidFill>
-                  <a:srgbClr val="1F1E1D"/>
+                  <a:srgbClr val="0F1B2D"/>
                 </a:solidFill>
                 <a:latin typeface="Arial"/>
               </a:rPr>
@@ -6420,7 +6420,7 @@
             <a:r>
               <a:rPr sz="1300" b="0">
                 <a:solidFill>
-                  <a:srgbClr val="75736B"/>
+                  <a:srgbClr val="56667B"/>
                 </a:solidFill>
                 <a:latin typeface="Arial"/>
               </a:rPr>
@@ -6450,7 +6450,7 @@
           </a:solidFill>
           <a:ln>
             <a:solidFill>
-              <a:srgbClr val="E6E3D8"/>
+              <a:srgbClr val="DBE3EC"/>
             </a:solidFill>
           </a:ln>
           <a:effectLst/>
@@ -6503,7 +6503,7 @@
             <a:r>
               <a:rPr sz="2400" b="0">
                 <a:solidFill>
-                  <a:srgbClr val="1F1E1D"/>
+                  <a:srgbClr val="0F1B2D"/>
                 </a:solidFill>
                 <a:latin typeface="Arial"/>
               </a:rPr>
@@ -6538,7 +6538,7 @@
             <a:r>
               <a:rPr sz="1700" b="1">
                 <a:solidFill>
-                  <a:srgbClr val="1F1E1D"/>
+                  <a:srgbClr val="0F1B2D"/>
                 </a:solidFill>
                 <a:latin typeface="Arial"/>
               </a:rPr>
@@ -6573,7 +6573,7 @@
             <a:r>
               <a:rPr sz="1300" b="0">
                 <a:solidFill>
-                  <a:srgbClr val="75736B"/>
+                  <a:srgbClr val="56667B"/>
                 </a:solidFill>
                 <a:latin typeface="Arial"/>
               </a:rPr>
@@ -6603,7 +6603,7 @@
           </a:solidFill>
           <a:ln>
             <a:solidFill>
-              <a:srgbClr val="E6E3D8"/>
+              <a:srgbClr val="DBE3EC"/>
             </a:solidFill>
           </a:ln>
           <a:effectLst/>
@@ -6656,7 +6656,7 @@
             <a:r>
               <a:rPr sz="2400" b="0">
                 <a:solidFill>
-                  <a:srgbClr val="1F1E1D"/>
+                  <a:srgbClr val="0F1B2D"/>
                 </a:solidFill>
                 <a:latin typeface="Arial"/>
               </a:rPr>
@@ -6691,7 +6691,7 @@
             <a:r>
               <a:rPr sz="1700" b="1">
                 <a:solidFill>
-                  <a:srgbClr val="1F1E1D"/>
+                  <a:srgbClr val="0F1B2D"/>
                 </a:solidFill>
                 <a:latin typeface="Arial"/>
               </a:rPr>
@@ -6726,7 +6726,7 @@
             <a:r>
               <a:rPr sz="1300" b="0">
                 <a:solidFill>
-                  <a:srgbClr val="75736B"/>
+                  <a:srgbClr val="56667B"/>
                 </a:solidFill>
                 <a:latin typeface="Arial"/>
               </a:rPr>
@@ -6761,7 +6761,7 @@
             <a:r>
               <a:rPr sz="1700" b="0">
                 <a:solidFill>
-                  <a:srgbClr val="75736B"/>
+                  <a:srgbClr val="56667B"/>
                 </a:solidFill>
                 <a:latin typeface="Arial"/>
               </a:rPr>
@@ -6803,7 +6803,7 @@
             <a:avLst/>
           </a:prstGeom>
           <a:solidFill>
-            <a:srgbClr val="C2603E"/>
+            <a:srgbClr val="0089A8"/>
           </a:solidFill>
           <a:ln>
             <a:noFill/>
@@ -6858,7 +6858,7 @@
             <a:r>
               <a:rPr sz="3000" b="1">
                 <a:solidFill>
-                  <a:srgbClr val="1F1E1D"/>
+                  <a:srgbClr val="0F1B2D"/>
                 </a:solidFill>
                 <a:latin typeface="Arial"/>
               </a:rPr>
@@ -6893,7 +6893,7 @@
             <a:r>
               <a:rPr sz="1000" b="0">
                 <a:solidFill>
-                  <a:srgbClr val="75736B"/>
+                  <a:srgbClr val="56667B"/>
                 </a:solidFill>
                 <a:latin typeface="Arial"/>
               </a:rPr>
@@ -6917,7 +6917,7 @@
             <a:avLst/>
           </a:prstGeom>
           <a:solidFill>
-            <a:srgbClr val="C2603E"/>
+            <a:srgbClr val="0089A8"/>
           </a:solidFill>
           <a:ln>
             <a:noFill/>
@@ -6980,7 +6980,7 @@
             <a:r>
               <a:rPr sz="2000" b="1">
                 <a:solidFill>
-                  <a:srgbClr val="1F1E1D"/>
+                  <a:srgbClr val="0F1B2D"/>
                 </a:solidFill>
                 <a:latin typeface="Arial"/>
               </a:rPr>
@@ -7015,7 +7015,7 @@
             <a:r>
               <a:rPr sz="1400" b="0">
                 <a:solidFill>
-                  <a:srgbClr val="75736B"/>
+                  <a:srgbClr val="56667B"/>
                 </a:solidFill>
                 <a:latin typeface="Arial"/>
               </a:rPr>
@@ -7039,7 +7039,7 @@
             <a:avLst/>
           </a:prstGeom>
           <a:solidFill>
-            <a:srgbClr val="C2603E"/>
+            <a:srgbClr val="0089A8"/>
           </a:solidFill>
           <a:ln>
             <a:noFill/>
@@ -7102,7 +7102,7 @@
             <a:r>
               <a:rPr sz="2000" b="1">
                 <a:solidFill>
-                  <a:srgbClr val="1F1E1D"/>
+                  <a:srgbClr val="0F1B2D"/>
                 </a:solidFill>
                 <a:latin typeface="Arial"/>
               </a:rPr>
@@ -7137,7 +7137,7 @@
             <a:r>
               <a:rPr sz="1400" b="0">
                 <a:solidFill>
-                  <a:srgbClr val="75736B"/>
+                  <a:srgbClr val="56667B"/>
                 </a:solidFill>
                 <a:latin typeface="Arial"/>
               </a:rPr>
@@ -7161,7 +7161,7 @@
             <a:avLst/>
           </a:prstGeom>
           <a:solidFill>
-            <a:srgbClr val="C2603E"/>
+            <a:srgbClr val="0089A8"/>
           </a:solidFill>
           <a:ln>
             <a:noFill/>
@@ -7224,7 +7224,7 @@
             <a:r>
               <a:rPr sz="2000" b="1">
                 <a:solidFill>
-                  <a:srgbClr val="1F1E1D"/>
+                  <a:srgbClr val="0F1B2D"/>
                 </a:solidFill>
                 <a:latin typeface="Arial"/>
               </a:rPr>
@@ -7259,7 +7259,7 @@
             <a:r>
               <a:rPr sz="1400" b="0">
                 <a:solidFill>
-                  <a:srgbClr val="75736B"/>
+                  <a:srgbClr val="56667B"/>
                 </a:solidFill>
                 <a:latin typeface="Arial"/>
               </a:rPr>
@@ -7292,7 +7292,7 @@
           </a:prstGeom>
           <a:ln>
             <a:solidFill>
-              <a:srgbClr val="E6E3D8"/>
+              <a:srgbClr val="DBE3EC"/>
             </a:solidFill>
           </a:ln>
         </p:spPr>
@@ -7330,7 +7330,7 @@
             <a:avLst/>
           </a:prstGeom>
           <a:solidFill>
-            <a:srgbClr val="C2603E"/>
+            <a:srgbClr val="0089A8"/>
           </a:solidFill>
           <a:ln>
             <a:noFill/>
@@ -7385,7 +7385,7 @@
             <a:r>
               <a:rPr sz="3000" b="1">
                 <a:solidFill>
-                  <a:srgbClr val="1F1E1D"/>
+                  <a:srgbClr val="0F1B2D"/>
                 </a:solidFill>
                 <a:latin typeface="Arial"/>
               </a:rPr>
@@ -7420,7 +7420,7 @@
             <a:r>
               <a:rPr sz="1000" b="0">
                 <a:solidFill>
-                  <a:srgbClr val="75736B"/>
+                  <a:srgbClr val="56667B"/>
                 </a:solidFill>
                 <a:latin typeface="Arial"/>
               </a:rPr>
@@ -7453,7 +7453,7 @@
           </a:prstGeom>
           <a:ln>
             <a:solidFill>
-              <a:srgbClr val="E6E3D8"/>
+              <a:srgbClr val="DBE3EC"/>
             </a:solidFill>
           </a:ln>
         </p:spPr>
@@ -7488,7 +7488,7 @@
             <a:r>
               <a:rPr sz="1500" b="1">
                 <a:solidFill>
-                  <a:srgbClr val="1F1E1D"/>
+                  <a:srgbClr val="0F1B2D"/>
                 </a:solidFill>
                 <a:latin typeface="Arial"/>
               </a:rPr>
@@ -7497,7 +7497,7 @@
             <a:r>
               <a:rPr sz="1500">
                 <a:solidFill>
-                  <a:srgbClr val="75736B"/>
+                  <a:srgbClr val="56667B"/>
                 </a:solidFill>
                 <a:latin typeface="Arial"/>
               </a:rPr>
@@ -7513,7 +7513,7 @@
             <a:r>
               <a:rPr sz="1500" b="1">
                 <a:solidFill>
-                  <a:srgbClr val="1F1E1D"/>
+                  <a:srgbClr val="0F1B2D"/>
                 </a:solidFill>
                 <a:latin typeface="Arial"/>
               </a:rPr>
@@ -7522,7 +7522,7 @@
             <a:r>
               <a:rPr sz="1500">
                 <a:solidFill>
-                  <a:srgbClr val="75736B"/>
+                  <a:srgbClr val="56667B"/>
                 </a:solidFill>
                 <a:latin typeface="Arial"/>
               </a:rPr>
@@ -7538,7 +7538,7 @@
             <a:r>
               <a:rPr sz="1500" b="1">
                 <a:solidFill>
-                  <a:srgbClr val="1F1E1D"/>
+                  <a:srgbClr val="0F1B2D"/>
                 </a:solidFill>
                 <a:latin typeface="Arial"/>
               </a:rPr>
@@ -7547,7 +7547,7 @@
             <a:r>
               <a:rPr sz="1500">
                 <a:solidFill>
-                  <a:srgbClr val="75736B"/>
+                  <a:srgbClr val="56667B"/>
                 </a:solidFill>
                 <a:latin typeface="Arial"/>
               </a:rPr>
@@ -7563,7 +7563,7 @@
             <a:r>
               <a:rPr sz="1500" b="1">
                 <a:solidFill>
-                  <a:srgbClr val="1F1E1D"/>
+                  <a:srgbClr val="0F1B2D"/>
                 </a:solidFill>
                 <a:latin typeface="Arial"/>
               </a:rPr>
@@ -7572,7 +7572,7 @@
             <a:r>
               <a:rPr sz="1500">
                 <a:solidFill>
-                  <a:srgbClr val="75736B"/>
+                  <a:srgbClr val="56667B"/>
                 </a:solidFill>
                 <a:latin typeface="Arial"/>
               </a:rPr>
@@ -7614,7 +7614,7 @@
             <a:avLst/>
           </a:prstGeom>
           <a:solidFill>
-            <a:srgbClr val="C2603E"/>
+            <a:srgbClr val="0089A8"/>
           </a:solidFill>
           <a:ln>
             <a:noFill/>
@@ -7669,7 +7669,7 @@
             <a:r>
               <a:rPr sz="3000" b="1">
                 <a:solidFill>
-                  <a:srgbClr val="1F1E1D"/>
+                  <a:srgbClr val="0F1B2D"/>
                 </a:solidFill>
                 <a:latin typeface="Arial"/>
               </a:rPr>
@@ -7704,7 +7704,7 @@
             <a:r>
               <a:rPr sz="1000" b="0">
                 <a:solidFill>
-                  <a:srgbClr val="75736B"/>
+                  <a:srgbClr val="56667B"/>
                 </a:solidFill>
                 <a:latin typeface="Arial"/>
               </a:rPr>
@@ -7734,7 +7734,7 @@
           </a:solidFill>
           <a:ln>
             <a:solidFill>
-              <a:srgbClr val="E6E3D8"/>
+              <a:srgbClr val="DBE3EC"/>
             </a:solidFill>
           </a:ln>
           <a:effectLst/>
@@ -7787,7 +7787,7 @@
             <a:r>
               <a:rPr sz="1700" b="1">
                 <a:solidFill>
-                  <a:srgbClr val="1F1E1D"/>
+                  <a:srgbClr val="0F1B2D"/>
                 </a:solidFill>
                 <a:latin typeface="Arial"/>
               </a:rPr>
@@ -7822,7 +7822,7 @@
             <a:r>
               <a:rPr sz="1250" b="0">
                 <a:solidFill>
-                  <a:srgbClr val="75736B"/>
+                  <a:srgbClr val="56667B"/>
                 </a:solidFill>
                 <a:latin typeface="Arial"/>
               </a:rPr>
@@ -7848,11 +7848,11 @@
             </a:avLst>
           </a:prstGeom>
           <a:solidFill>
-            <a:srgbClr val="F6E8E1"/>
+            <a:srgbClr val="DFF2F7"/>
           </a:solidFill>
           <a:ln>
             <a:solidFill>
-              <a:srgbClr val="E6E3D8"/>
+              <a:srgbClr val="DBE3EC"/>
             </a:solidFill>
           </a:ln>
           <a:effectLst/>
@@ -7905,7 +7905,7 @@
             <a:r>
               <a:rPr sz="1700" b="1">
                 <a:solidFill>
-                  <a:srgbClr val="1F1E1D"/>
+                  <a:srgbClr val="0F1B2D"/>
                 </a:solidFill>
                 <a:latin typeface="Arial"/>
               </a:rPr>
@@ -7940,7 +7940,7 @@
             <a:r>
               <a:rPr sz="1250" b="0">
                 <a:solidFill>
-                  <a:srgbClr val="75736B"/>
+                  <a:srgbClr val="56667B"/>
                 </a:solidFill>
                 <a:latin typeface="Arial"/>
               </a:rPr>
@@ -7966,11 +7966,11 @@
             </a:avLst>
           </a:prstGeom>
           <a:solidFill>
-            <a:srgbClr val="F6E8E1"/>
+            <a:srgbClr val="DFF2F7"/>
           </a:solidFill>
           <a:ln>
             <a:solidFill>
-              <a:srgbClr val="E6E3D8"/>
+              <a:srgbClr val="DBE3EC"/>
             </a:solidFill>
           </a:ln>
           <a:effectLst/>
@@ -8023,7 +8023,7 @@
             <a:r>
               <a:rPr sz="1700" b="1">
                 <a:solidFill>
-                  <a:srgbClr val="1F1E1D"/>
+                  <a:srgbClr val="0F1B2D"/>
                 </a:solidFill>
                 <a:latin typeface="Arial"/>
               </a:rPr>
@@ -8058,7 +8058,7 @@
             <a:r>
               <a:rPr sz="1250" b="0">
                 <a:solidFill>
-                  <a:srgbClr val="75736B"/>
+                  <a:srgbClr val="56667B"/>
                 </a:solidFill>
                 <a:latin typeface="Arial"/>
               </a:rPr>
@@ -8091,7 +8091,7 @@
           </a:prstGeom>
           <a:ln>
             <a:solidFill>
-              <a:srgbClr val="E6E3D8"/>
+              <a:srgbClr val="DBE3EC"/>
             </a:solidFill>
           </a:ln>
         </p:spPr>
@@ -8120,7 +8120,7 @@
           </a:prstGeom>
           <a:ln>
             <a:solidFill>
-              <a:srgbClr val="E6E3D8"/>
+              <a:srgbClr val="DBE3EC"/>
             </a:solidFill>
           </a:ln>
         </p:spPr>
@@ -8158,7 +8158,7 @@
             <a:avLst/>
           </a:prstGeom>
           <a:solidFill>
-            <a:srgbClr val="C2603E"/>
+            <a:srgbClr val="0089A8"/>
           </a:solidFill>
           <a:ln>
             <a:noFill/>
@@ -8213,7 +8213,7 @@
             <a:r>
               <a:rPr sz="3000" b="1">
                 <a:solidFill>
-                  <a:srgbClr val="1F1E1D"/>
+                  <a:srgbClr val="0F1B2D"/>
                 </a:solidFill>
                 <a:latin typeface="Arial"/>
               </a:rPr>
@@ -8248,7 +8248,7 @@
             <a:r>
               <a:rPr sz="1000" b="0">
                 <a:solidFill>
-                  <a:srgbClr val="75736B"/>
+                  <a:srgbClr val="56667B"/>
                 </a:solidFill>
                 <a:latin typeface="Arial"/>
               </a:rPr>
@@ -8278,7 +8278,7 @@
           </a:solidFill>
           <a:ln>
             <a:solidFill>
-              <a:srgbClr val="E6E3D8"/>
+              <a:srgbClr val="DBE3EC"/>
             </a:solidFill>
           </a:ln>
           <a:effectLst/>
@@ -8331,7 +8331,7 @@
             <a:r>
               <a:rPr sz="2800" b="0">
                 <a:solidFill>
-                  <a:srgbClr val="1F1E1D"/>
+                  <a:srgbClr val="0F1B2D"/>
                 </a:solidFill>
                 <a:latin typeface="Arial"/>
               </a:rPr>
@@ -8366,7 +8366,7 @@
             <a:r>
               <a:rPr sz="1800" b="1">
                 <a:solidFill>
-                  <a:srgbClr val="1F1E1D"/>
+                  <a:srgbClr val="0F1B2D"/>
                 </a:solidFill>
                 <a:latin typeface="Arial"/>
               </a:rPr>
@@ -8401,7 +8401,7 @@
             <a:r>
               <a:rPr sz="1300" b="0">
                 <a:solidFill>
-                  <a:srgbClr val="75736B"/>
+                  <a:srgbClr val="56667B"/>
                 </a:solidFill>
                 <a:latin typeface="Arial"/>
               </a:rPr>
@@ -8426,7 +8426,7 @@
             <a:avLst/>
           </a:prstGeom>
           <a:solidFill>
-            <a:srgbClr val="C2603E"/>
+            <a:srgbClr val="0089A8"/>
           </a:solidFill>
           <a:ln>
             <a:noFill/>
@@ -8475,7 +8475,7 @@
           </a:solidFill>
           <a:ln>
             <a:solidFill>
-              <a:srgbClr val="E6E3D8"/>
+              <a:srgbClr val="DBE3EC"/>
             </a:solidFill>
           </a:ln>
           <a:effectLst/>
@@ -8528,7 +8528,7 @@
             <a:r>
               <a:rPr sz="2800" b="0">
                 <a:solidFill>
-                  <a:srgbClr val="1F1E1D"/>
+                  <a:srgbClr val="0F1B2D"/>
                 </a:solidFill>
                 <a:latin typeface="Arial"/>
               </a:rPr>
@@ -8563,7 +8563,7 @@
             <a:r>
               <a:rPr sz="1800" b="1">
                 <a:solidFill>
-                  <a:srgbClr val="1F1E1D"/>
+                  <a:srgbClr val="0F1B2D"/>
                 </a:solidFill>
                 <a:latin typeface="Arial"/>
               </a:rPr>
@@ -8598,7 +8598,7 @@
             <a:r>
               <a:rPr sz="1300" b="0">
                 <a:solidFill>
-                  <a:srgbClr val="75736B"/>
+                  <a:srgbClr val="56667B"/>
                 </a:solidFill>
                 <a:latin typeface="Arial"/>
               </a:rPr>
@@ -8623,7 +8623,7 @@
             <a:avLst/>
           </a:prstGeom>
           <a:solidFill>
-            <a:srgbClr val="C2603E"/>
+            <a:srgbClr val="0089A8"/>
           </a:solidFill>
           <a:ln>
             <a:noFill/>
@@ -8668,11 +8668,11 @@
             </a:avLst>
           </a:prstGeom>
           <a:solidFill>
-            <a:srgbClr val="F6E8E1"/>
+            <a:srgbClr val="DFF2F7"/>
           </a:solidFill>
           <a:ln>
             <a:solidFill>
-              <a:srgbClr val="E6E3D8"/>
+              <a:srgbClr val="DBE3EC"/>
             </a:solidFill>
           </a:ln>
           <a:effectLst/>
@@ -8725,7 +8725,7 @@
             <a:r>
               <a:rPr sz="2800" b="0">
                 <a:solidFill>
-                  <a:srgbClr val="1F1E1D"/>
+                  <a:srgbClr val="0F1B2D"/>
                 </a:solidFill>
                 <a:latin typeface="Arial"/>
               </a:rPr>
@@ -8760,7 +8760,7 @@
             <a:r>
               <a:rPr sz="1800" b="1">
                 <a:solidFill>
-                  <a:srgbClr val="1F1E1D"/>
+                  <a:srgbClr val="0F1B2D"/>
                 </a:solidFill>
                 <a:latin typeface="Arial"/>
               </a:rPr>
@@ -8795,7 +8795,7 @@
             <a:r>
               <a:rPr sz="1300" b="0">
                 <a:solidFill>
-                  <a:srgbClr val="75736B"/>
+                  <a:srgbClr val="56667B"/>
                 </a:solidFill>
                 <a:latin typeface="Arial"/>
               </a:rPr>
@@ -8820,7 +8820,7 @@
             <a:avLst/>
           </a:prstGeom>
           <a:solidFill>
-            <a:srgbClr val="C2603E"/>
+            <a:srgbClr val="0089A8"/>
           </a:solidFill>
           <a:ln>
             <a:noFill/>
@@ -8865,11 +8865,11 @@
             </a:avLst>
           </a:prstGeom>
           <a:solidFill>
-            <a:srgbClr val="F6E8E1"/>
+            <a:srgbClr val="DFF2F7"/>
           </a:solidFill>
           <a:ln>
             <a:solidFill>
-              <a:srgbClr val="E6E3D8"/>
+              <a:srgbClr val="DBE3EC"/>
             </a:solidFill>
           </a:ln>
           <a:effectLst/>
@@ -8922,7 +8922,7 @@
             <a:r>
               <a:rPr sz="2800" b="0">
                 <a:solidFill>
-                  <a:srgbClr val="1F1E1D"/>
+                  <a:srgbClr val="0F1B2D"/>
                 </a:solidFill>
                 <a:latin typeface="Arial"/>
               </a:rPr>
@@ -8957,7 +8957,7 @@
             <a:r>
               <a:rPr sz="1800" b="1">
                 <a:solidFill>
-                  <a:srgbClr val="1F1E1D"/>
+                  <a:srgbClr val="0F1B2D"/>
                 </a:solidFill>
                 <a:latin typeface="Arial"/>
               </a:rPr>
@@ -8992,7 +8992,7 @@
             <a:r>
               <a:rPr sz="1300" b="0">
                 <a:solidFill>
-                  <a:srgbClr val="75736B"/>
+                  <a:srgbClr val="56667B"/>
                 </a:solidFill>
                 <a:latin typeface="Arial"/>
               </a:rPr>
@@ -9017,7 +9017,7 @@
             <a:avLst/>
           </a:prstGeom>
           <a:solidFill>
-            <a:srgbClr val="C2603E"/>
+            <a:srgbClr val="0089A8"/>
           </a:solidFill>
           <a:ln>
             <a:noFill/>
@@ -9066,7 +9066,7 @@
           </a:solidFill>
           <a:ln>
             <a:solidFill>
-              <a:srgbClr val="E6E3D8"/>
+              <a:srgbClr val="DBE3EC"/>
             </a:solidFill>
           </a:ln>
           <a:effectLst/>
@@ -9119,7 +9119,7 @@
             <a:r>
               <a:rPr sz="2800" b="0">
                 <a:solidFill>
-                  <a:srgbClr val="1F1E1D"/>
+                  <a:srgbClr val="0F1B2D"/>
                 </a:solidFill>
                 <a:latin typeface="Arial"/>
               </a:rPr>
@@ -9154,7 +9154,7 @@
             <a:r>
               <a:rPr sz="1800" b="1">
                 <a:solidFill>
-                  <a:srgbClr val="1F1E1D"/>
+                  <a:srgbClr val="0F1B2D"/>
                 </a:solidFill>
                 <a:latin typeface="Arial"/>
               </a:rPr>
@@ -9189,7 +9189,7 @@
             <a:r>
               <a:rPr sz="1300" b="0">
                 <a:solidFill>
-                  <a:srgbClr val="75736B"/>
+                  <a:srgbClr val="56667B"/>
                 </a:solidFill>
                 <a:latin typeface="Arial"/>
               </a:rPr>
@@ -9229,7 +9229,7 @@
             <a:r>
               <a:rPr sz="1600" b="1">
                 <a:solidFill>
-                  <a:srgbClr val="1F1E1D"/>
+                  <a:srgbClr val="0F1B2D"/>
                 </a:solidFill>
                 <a:latin typeface="Arial"/>
               </a:rPr>
@@ -9238,7 +9238,7 @@
             <a:r>
               <a:rPr sz="1600">
                 <a:solidFill>
-                  <a:srgbClr val="75736B"/>
+                  <a:srgbClr val="56667B"/>
                 </a:solidFill>
                 <a:latin typeface="Arial"/>
               </a:rPr>
@@ -9254,7 +9254,7 @@
             <a:r>
               <a:rPr sz="1600" b="1">
                 <a:solidFill>
-                  <a:srgbClr val="1F1E1D"/>
+                  <a:srgbClr val="0F1B2D"/>
                 </a:solidFill>
                 <a:latin typeface="Arial"/>
               </a:rPr>
@@ -9263,7 +9263,7 @@
             <a:r>
               <a:rPr sz="1600">
                 <a:solidFill>
-                  <a:srgbClr val="75736B"/>
+                  <a:srgbClr val="56667B"/>
                 </a:solidFill>
                 <a:latin typeface="Arial"/>
               </a:rPr>
@@ -9279,7 +9279,7 @@
             <a:r>
               <a:rPr sz="1600" b="1">
                 <a:solidFill>
-                  <a:srgbClr val="1F1E1D"/>
+                  <a:srgbClr val="0F1B2D"/>
                 </a:solidFill>
                 <a:latin typeface="Arial"/>
               </a:rPr>
@@ -9288,7 +9288,7 @@
             <a:r>
               <a:rPr sz="1600">
                 <a:solidFill>
-                  <a:srgbClr val="75736B"/>
+                  <a:srgbClr val="56667B"/>
                 </a:solidFill>
                 <a:latin typeface="Arial"/>
               </a:rPr>
@@ -9330,7 +9330,7 @@
             <a:avLst/>
           </a:prstGeom>
           <a:solidFill>
-            <a:srgbClr val="C2603E"/>
+            <a:srgbClr val="0089A8"/>
           </a:solidFill>
           <a:ln>
             <a:noFill/>
@@ -9385,7 +9385,7 @@
             <a:r>
               <a:rPr sz="3000" b="1">
                 <a:solidFill>
-                  <a:srgbClr val="1F1E1D"/>
+                  <a:srgbClr val="0F1B2D"/>
                 </a:solidFill>
                 <a:latin typeface="Arial"/>
               </a:rPr>
@@ -9420,7 +9420,7 @@
             <a:r>
               <a:rPr sz="1000" b="0">
                 <a:solidFill>
-                  <a:srgbClr val="75736B"/>
+                  <a:srgbClr val="56667B"/>
                 </a:solidFill>
                 <a:latin typeface="Arial"/>
               </a:rPr>
@@ -9450,7 +9450,7 @@
           </a:solidFill>
           <a:ln>
             <a:solidFill>
-              <a:srgbClr val="E6E3D8"/>
+              <a:srgbClr val="DBE3EC"/>
             </a:solidFill>
           </a:ln>
           <a:effectLst/>
@@ -9503,7 +9503,7 @@
             <a:r>
               <a:rPr sz="2400" b="0">
                 <a:solidFill>
-                  <a:srgbClr val="1F1E1D"/>
+                  <a:srgbClr val="0F1B2D"/>
                 </a:solidFill>
                 <a:latin typeface="Arial"/>
               </a:rPr>
@@ -9538,7 +9538,7 @@
             <a:r>
               <a:rPr sz="1600" b="1">
                 <a:solidFill>
-                  <a:srgbClr val="1F1E1D"/>
+                  <a:srgbClr val="0F1B2D"/>
                 </a:solidFill>
                 <a:latin typeface="Arial"/>
               </a:rPr>
@@ -9573,7 +9573,7 @@
             <a:r>
               <a:rPr sz="1250" b="0">
                 <a:solidFill>
-                  <a:srgbClr val="75736B"/>
+                  <a:srgbClr val="56667B"/>
                 </a:solidFill>
                 <a:latin typeface="Arial"/>
               </a:rPr>
@@ -9603,7 +9603,7 @@
           </a:solidFill>
           <a:ln>
             <a:solidFill>
-              <a:srgbClr val="E6E3D8"/>
+              <a:srgbClr val="DBE3EC"/>
             </a:solidFill>
           </a:ln>
           <a:effectLst/>
@@ -9656,7 +9656,7 @@
             <a:r>
               <a:rPr sz="2400" b="0">
                 <a:solidFill>
-                  <a:srgbClr val="1F1E1D"/>
+                  <a:srgbClr val="0F1B2D"/>
                 </a:solidFill>
                 <a:latin typeface="Arial"/>
               </a:rPr>
@@ -9691,7 +9691,7 @@
             <a:r>
               <a:rPr sz="1600" b="1">
                 <a:solidFill>
-                  <a:srgbClr val="1F1E1D"/>
+                  <a:srgbClr val="0F1B2D"/>
                 </a:solidFill>
                 <a:latin typeface="Arial"/>
               </a:rPr>
@@ -9726,7 +9726,7 @@
             <a:r>
               <a:rPr sz="1250" b="0">
                 <a:solidFill>
-                  <a:srgbClr val="75736B"/>
+                  <a:srgbClr val="56667B"/>
                 </a:solidFill>
                 <a:latin typeface="Arial"/>
               </a:rPr>
@@ -9756,7 +9756,7 @@
           </a:solidFill>
           <a:ln>
             <a:solidFill>
-              <a:srgbClr val="E6E3D8"/>
+              <a:srgbClr val="DBE3EC"/>
             </a:solidFill>
           </a:ln>
           <a:effectLst/>
@@ -9809,7 +9809,7 @@
             <a:r>
               <a:rPr sz="2400" b="0">
                 <a:solidFill>
-                  <a:srgbClr val="1F1E1D"/>
+                  <a:srgbClr val="0F1B2D"/>
                 </a:solidFill>
                 <a:latin typeface="Arial"/>
               </a:rPr>
@@ -9844,7 +9844,7 @@
             <a:r>
               <a:rPr sz="1600" b="1">
                 <a:solidFill>
-                  <a:srgbClr val="1F1E1D"/>
+                  <a:srgbClr val="0F1B2D"/>
                 </a:solidFill>
                 <a:latin typeface="Arial"/>
               </a:rPr>
@@ -9879,7 +9879,7 @@
             <a:r>
               <a:rPr sz="1250" b="0">
                 <a:solidFill>
-                  <a:srgbClr val="75736B"/>
+                  <a:srgbClr val="56667B"/>
                 </a:solidFill>
                 <a:latin typeface="Arial"/>
               </a:rPr>
@@ -9909,7 +9909,7 @@
           </a:solidFill>
           <a:ln>
             <a:solidFill>
-              <a:srgbClr val="E6E3D8"/>
+              <a:srgbClr val="DBE3EC"/>
             </a:solidFill>
           </a:ln>
           <a:effectLst/>
@@ -9962,7 +9962,7 @@
             <a:r>
               <a:rPr sz="2400" b="0">
                 <a:solidFill>
-                  <a:srgbClr val="1F1E1D"/>
+                  <a:srgbClr val="0F1B2D"/>
                 </a:solidFill>
                 <a:latin typeface="Arial"/>
               </a:rPr>
@@ -9997,7 +9997,7 @@
             <a:r>
               <a:rPr sz="1600" b="1">
                 <a:solidFill>
-                  <a:srgbClr val="1F1E1D"/>
+                  <a:srgbClr val="0F1B2D"/>
                 </a:solidFill>
                 <a:latin typeface="Arial"/>
               </a:rPr>
@@ -10032,7 +10032,7 @@
             <a:r>
               <a:rPr sz="1250" b="0">
                 <a:solidFill>
-                  <a:srgbClr val="75736B"/>
+                  <a:srgbClr val="56667B"/>
                 </a:solidFill>
                 <a:latin typeface="Arial"/>
               </a:rPr>
@@ -10062,7 +10062,7 @@
           </a:solidFill>
           <a:ln>
             <a:solidFill>
-              <a:srgbClr val="E6E3D8"/>
+              <a:srgbClr val="DBE3EC"/>
             </a:solidFill>
           </a:ln>
           <a:effectLst/>
@@ -10115,7 +10115,7 @@
             <a:r>
               <a:rPr sz="2400" b="0">
                 <a:solidFill>
-                  <a:srgbClr val="1F1E1D"/>
+                  <a:srgbClr val="0F1B2D"/>
                 </a:solidFill>
                 <a:latin typeface="Arial"/>
               </a:rPr>
@@ -10150,7 +10150,7 @@
             <a:r>
               <a:rPr sz="1600" b="1">
                 <a:solidFill>
-                  <a:srgbClr val="1F1E1D"/>
+                  <a:srgbClr val="0F1B2D"/>
                 </a:solidFill>
                 <a:latin typeface="Arial"/>
               </a:rPr>
@@ -10185,7 +10185,7 @@
             <a:r>
               <a:rPr sz="1250" b="0">
                 <a:solidFill>
-                  <a:srgbClr val="75736B"/>
+                  <a:srgbClr val="56667B"/>
                 </a:solidFill>
                 <a:latin typeface="Arial"/>
               </a:rPr>
@@ -10215,7 +10215,7 @@
           </a:solidFill>
           <a:ln>
             <a:solidFill>
-              <a:srgbClr val="E6E3D8"/>
+              <a:srgbClr val="DBE3EC"/>
             </a:solidFill>
           </a:ln>
           <a:effectLst/>
@@ -10268,7 +10268,7 @@
             <a:r>
               <a:rPr sz="2400" b="0">
                 <a:solidFill>
-                  <a:srgbClr val="1F1E1D"/>
+                  <a:srgbClr val="0F1B2D"/>
                 </a:solidFill>
                 <a:latin typeface="Arial"/>
               </a:rPr>
@@ -10303,7 +10303,7 @@
             <a:r>
               <a:rPr sz="1600" b="1">
                 <a:solidFill>
-                  <a:srgbClr val="1F1E1D"/>
+                  <a:srgbClr val="0F1B2D"/>
                 </a:solidFill>
                 <a:latin typeface="Arial"/>
               </a:rPr>
@@ -10338,7 +10338,7 @@
             <a:r>
               <a:rPr sz="1250" b="0">
                 <a:solidFill>
-                  <a:srgbClr val="75736B"/>
+                  <a:srgbClr val="56667B"/>
                 </a:solidFill>
                 <a:latin typeface="Arial"/>
               </a:rPr>
@@ -10368,7 +10368,7 @@
           </a:solidFill>
           <a:ln>
             <a:solidFill>
-              <a:srgbClr val="E6E3D8"/>
+              <a:srgbClr val="DBE3EC"/>
             </a:solidFill>
           </a:ln>
           <a:effectLst/>
@@ -10421,7 +10421,7 @@
             <a:r>
               <a:rPr sz="2400" b="0">
                 <a:solidFill>
-                  <a:srgbClr val="1F1E1D"/>
+                  <a:srgbClr val="0F1B2D"/>
                 </a:solidFill>
                 <a:latin typeface="Arial"/>
               </a:rPr>
@@ -10456,7 +10456,7 @@
             <a:r>
               <a:rPr sz="1600" b="1">
                 <a:solidFill>
-                  <a:srgbClr val="1F1E1D"/>
+                  <a:srgbClr val="0F1B2D"/>
                 </a:solidFill>
                 <a:latin typeface="Arial"/>
               </a:rPr>
@@ -10491,7 +10491,7 @@
             <a:r>
               <a:rPr sz="1250" b="0">
                 <a:solidFill>
-                  <a:srgbClr val="75736B"/>
+                  <a:srgbClr val="56667B"/>
                 </a:solidFill>
                 <a:latin typeface="Arial"/>
               </a:rPr>
@@ -10521,7 +10521,7 @@
           </a:solidFill>
           <a:ln>
             <a:solidFill>
-              <a:srgbClr val="E6E3D8"/>
+              <a:srgbClr val="DBE3EC"/>
             </a:solidFill>
           </a:ln>
           <a:effectLst/>
@@ -10574,7 +10574,7 @@
             <a:r>
               <a:rPr sz="2400" b="0">
                 <a:solidFill>
-                  <a:srgbClr val="1F1E1D"/>
+                  <a:srgbClr val="0F1B2D"/>
                 </a:solidFill>
                 <a:latin typeface="Arial"/>
               </a:rPr>
@@ -10609,7 +10609,7 @@
             <a:r>
               <a:rPr sz="1600" b="1">
                 <a:solidFill>
-                  <a:srgbClr val="1F1E1D"/>
+                  <a:srgbClr val="0F1B2D"/>
                 </a:solidFill>
                 <a:latin typeface="Arial"/>
               </a:rPr>
@@ -10644,7 +10644,7 @@
             <a:r>
               <a:rPr sz="1250" b="0">
                 <a:solidFill>
-                  <a:srgbClr val="75736B"/>
+                  <a:srgbClr val="56667B"/>
                 </a:solidFill>
                 <a:latin typeface="Arial"/>
               </a:rPr>
@@ -10679,7 +10679,7 @@
             <a:r>
               <a:rPr sz="1100" b="0">
                 <a:solidFill>
-                  <a:srgbClr val="75736B"/>
+                  <a:srgbClr val="56667B"/>
                 </a:solidFill>
                 <a:latin typeface="Arial"/>
               </a:rPr>
@@ -10721,7 +10721,7 @@
             <a:avLst/>
           </a:prstGeom>
           <a:solidFill>
-            <a:srgbClr val="C2603E"/>
+            <a:srgbClr val="0089A8"/>
           </a:solidFill>
           <a:ln>
             <a:noFill/>
@@ -10776,7 +10776,7 @@
             <a:r>
               <a:rPr sz="3000" b="1">
                 <a:solidFill>
-                  <a:srgbClr val="1F1E1D"/>
+                  <a:srgbClr val="0F1B2D"/>
                 </a:solidFill>
                 <a:latin typeface="Arial"/>
               </a:rPr>
@@ -10811,7 +10811,7 @@
             <a:r>
               <a:rPr sz="1000" b="0">
                 <a:solidFill>
-                  <a:srgbClr val="75736B"/>
+                  <a:srgbClr val="56667B"/>
                 </a:solidFill>
                 <a:latin typeface="Arial"/>
               </a:rPr>
@@ -10861,7 +10861,7 @@
                   </a:txBody>
                   <a:tcPr>
                     <a:solidFill>
-                      <a:srgbClr val="C2603E"/>
+                      <a:srgbClr val="0089A8"/>
                     </a:solidFill>
                   </a:tcPr>
                 </a:tc>
@@ -10883,7 +10883,7 @@
                   </a:txBody>
                   <a:tcPr>
                     <a:solidFill>
-                      <a:srgbClr val="C2603E"/>
+                      <a:srgbClr val="0089A8"/>
                     </a:solidFill>
                   </a:tcPr>
                 </a:tc>
@@ -10897,7 +10897,7 @@
                       <a:r>
                         <a:rPr sz="1600" b="1">
                           <a:solidFill>
-                            <a:srgbClr val="1F1E1D"/>
+                            <a:srgbClr val="0F1B2D"/>
                           </a:solidFill>
                           <a:latin typeface="Arial"/>
                         </a:rPr>
@@ -10907,7 +10907,7 @@
                   </a:txBody>
                   <a:tcPr>
                     <a:solidFill>
-                      <a:srgbClr val="F6E8E1"/>
+                      <a:srgbClr val="DFF2F7"/>
                     </a:solidFill>
                   </a:tcPr>
                 </a:tc>
@@ -10919,7 +10919,7 @@
                       <a:r>
                         <a:rPr sz="1600" b="0">
                           <a:solidFill>
-                            <a:srgbClr val="1F1E1D"/>
+                            <a:srgbClr val="0F1B2D"/>
                           </a:solidFill>
                           <a:latin typeface="Arial"/>
                         </a:rPr>
@@ -10929,7 +10929,7 @@
                   </a:txBody>
                   <a:tcPr>
                     <a:solidFill>
-                      <a:srgbClr val="F6E8E1"/>
+                      <a:srgbClr val="DFF2F7"/>
                     </a:solidFill>
                   </a:tcPr>
                 </a:tc>
@@ -10943,7 +10943,7 @@
                       <a:r>
                         <a:rPr sz="1600" b="1">
                           <a:solidFill>
-                            <a:srgbClr val="1F1E1D"/>
+                            <a:srgbClr val="0F1B2D"/>
                           </a:solidFill>
                           <a:latin typeface="Arial"/>
                         </a:rPr>
@@ -10965,7 +10965,7 @@
                       <a:r>
                         <a:rPr sz="1600" b="0">
                           <a:solidFill>
-                            <a:srgbClr val="1F1E1D"/>
+                            <a:srgbClr val="0F1B2D"/>
                           </a:solidFill>
                           <a:latin typeface="Arial"/>
                         </a:rPr>
@@ -10989,7 +10989,7 @@
                       <a:r>
                         <a:rPr sz="1600" b="1">
                           <a:solidFill>
-                            <a:srgbClr val="1F1E1D"/>
+                            <a:srgbClr val="0F1B2D"/>
                           </a:solidFill>
                           <a:latin typeface="Arial"/>
                         </a:rPr>
@@ -10999,7 +10999,7 @@
                   </a:txBody>
                   <a:tcPr>
                     <a:solidFill>
-                      <a:srgbClr val="F6E8E1"/>
+                      <a:srgbClr val="DFF2F7"/>
                     </a:solidFill>
                   </a:tcPr>
                 </a:tc>
@@ -11011,7 +11011,7 @@
                       <a:r>
                         <a:rPr sz="1600" b="0">
                           <a:solidFill>
-                            <a:srgbClr val="1F1E1D"/>
+                            <a:srgbClr val="0F1B2D"/>
                           </a:solidFill>
                           <a:latin typeface="Arial"/>
                         </a:rPr>
@@ -11021,7 +11021,7 @@
                   </a:txBody>
                   <a:tcPr>
                     <a:solidFill>
-                      <a:srgbClr val="F6E8E1"/>
+                      <a:srgbClr val="DFF2F7"/>
                     </a:solidFill>
                   </a:tcPr>
                 </a:tc>
@@ -11035,7 +11035,7 @@
                       <a:r>
                         <a:rPr sz="1600" b="1">
                           <a:solidFill>
-                            <a:srgbClr val="1F1E1D"/>
+                            <a:srgbClr val="0F1B2D"/>
                           </a:solidFill>
                           <a:latin typeface="Arial"/>
                         </a:rPr>
@@ -11057,7 +11057,7 @@
                       <a:r>
                         <a:rPr sz="1600" b="0">
                           <a:solidFill>
-                            <a:srgbClr val="1F1E1D"/>
+                            <a:srgbClr val="0F1B2D"/>
                           </a:solidFill>
                           <a:latin typeface="Arial"/>
                         </a:rPr>
@@ -11081,7 +11081,7 @@
                       <a:r>
                         <a:rPr sz="1600" b="1">
                           <a:solidFill>
-                            <a:srgbClr val="1F1E1D"/>
+                            <a:srgbClr val="0F1B2D"/>
                           </a:solidFill>
                           <a:latin typeface="Arial"/>
                         </a:rPr>
@@ -11091,7 +11091,7 @@
                   </a:txBody>
                   <a:tcPr>
                     <a:solidFill>
-                      <a:srgbClr val="F6E8E1"/>
+                      <a:srgbClr val="DFF2F7"/>
                     </a:solidFill>
                   </a:tcPr>
                 </a:tc>
@@ -11103,7 +11103,7 @@
                       <a:r>
                         <a:rPr sz="1600" b="0">
                           <a:solidFill>
-                            <a:srgbClr val="1F1E1D"/>
+                            <a:srgbClr val="0F1B2D"/>
                           </a:solidFill>
                           <a:latin typeface="Arial"/>
                         </a:rPr>
@@ -11113,7 +11113,7 @@
                   </a:txBody>
                   <a:tcPr>
                     <a:solidFill>
-                      <a:srgbClr val="F6E8E1"/>
+                      <a:srgbClr val="DFF2F7"/>
                     </a:solidFill>
                   </a:tcPr>
                 </a:tc>
@@ -11127,7 +11127,7 @@
                       <a:r>
                         <a:rPr sz="1600" b="1">
                           <a:solidFill>
-                            <a:srgbClr val="1F1E1D"/>
+                            <a:srgbClr val="0F1B2D"/>
                           </a:solidFill>
                           <a:latin typeface="Arial"/>
                         </a:rPr>
@@ -11149,7 +11149,7 @@
                       <a:r>
                         <a:rPr sz="1600" b="0">
                           <a:solidFill>
-                            <a:srgbClr val="1F1E1D"/>
+                            <a:srgbClr val="0F1B2D"/>
                           </a:solidFill>
                           <a:latin typeface="Arial"/>
                         </a:rPr>
@@ -11173,7 +11173,7 @@
                       <a:r>
                         <a:rPr sz="1600" b="1">
                           <a:solidFill>
-                            <a:srgbClr val="1F1E1D"/>
+                            <a:srgbClr val="0F1B2D"/>
                           </a:solidFill>
                           <a:latin typeface="Arial"/>
                         </a:rPr>
@@ -11183,7 +11183,7 @@
                   </a:txBody>
                   <a:tcPr>
                     <a:solidFill>
-                      <a:srgbClr val="F6E8E1"/>
+                      <a:srgbClr val="DFF2F7"/>
                     </a:solidFill>
                   </a:tcPr>
                 </a:tc>
@@ -11195,7 +11195,7 @@
                       <a:r>
                         <a:rPr sz="1600" b="0">
                           <a:solidFill>
-                            <a:srgbClr val="1F1E1D"/>
+                            <a:srgbClr val="0F1B2D"/>
                           </a:solidFill>
                           <a:latin typeface="Arial"/>
                         </a:rPr>
@@ -11205,7 +11205,7 @@
                   </a:txBody>
                   <a:tcPr>
                     <a:solidFill>
-                      <a:srgbClr val="F6E8E1"/>
+                      <a:srgbClr val="DFF2F7"/>
                     </a:solidFill>
                   </a:tcPr>
                 </a:tc>
@@ -11247,7 +11247,7 @@
             <a:avLst/>
           </a:prstGeom>
           <a:solidFill>
-            <a:srgbClr val="C2603E"/>
+            <a:srgbClr val="0089A8"/>
           </a:solidFill>
           <a:ln>
             <a:noFill/>
@@ -11302,7 +11302,7 @@
             <a:r>
               <a:rPr sz="3000" b="1">
                 <a:solidFill>
-                  <a:srgbClr val="1F1E1D"/>
+                  <a:srgbClr val="0F1B2D"/>
                 </a:solidFill>
                 <a:latin typeface="Arial"/>
               </a:rPr>
@@ -11337,7 +11337,7 @@
             <a:r>
               <a:rPr sz="1000" b="0">
                 <a:solidFill>
-                  <a:srgbClr val="75736B"/>
+                  <a:srgbClr val="56667B"/>
                 </a:solidFill>
                 <a:latin typeface="Arial"/>
               </a:rPr>
@@ -11363,7 +11363,7 @@
             </a:avLst>
           </a:prstGeom>
           <a:solidFill>
-            <a:srgbClr val="C2603E"/>
+            <a:srgbClr val="0089A8"/>
           </a:solidFill>
           <a:ln>
             <a:noFill/>
@@ -11453,7 +11453,7 @@
             <a:r>
               <a:rPr sz="1700" b="0">
                 <a:solidFill>
-                  <a:srgbClr val="1F1E1D"/>
+                  <a:srgbClr val="0F1B2D"/>
                 </a:solidFill>
                 <a:latin typeface="Arial"/>
               </a:rPr>
@@ -11479,7 +11479,7 @@
             </a:avLst>
           </a:prstGeom>
           <a:solidFill>
-            <a:srgbClr val="C2603E"/>
+            <a:srgbClr val="0089A8"/>
           </a:solidFill>
           <a:ln>
             <a:noFill/>
@@ -11569,7 +11569,7 @@
             <a:r>
               <a:rPr sz="1700" b="0">
                 <a:solidFill>
-                  <a:srgbClr val="1F1E1D"/>
+                  <a:srgbClr val="0F1B2D"/>
                 </a:solidFill>
                 <a:latin typeface="Arial"/>
               </a:rPr>
@@ -11595,7 +11595,7 @@
             </a:avLst>
           </a:prstGeom>
           <a:solidFill>
-            <a:srgbClr val="C2603E"/>
+            <a:srgbClr val="0089A8"/>
           </a:solidFill>
           <a:ln>
             <a:noFill/>
@@ -11685,7 +11685,7 @@
             <a:r>
               <a:rPr sz="1700" b="0">
                 <a:solidFill>
-                  <a:srgbClr val="1F1E1D"/>
+                  <a:srgbClr val="0F1B2D"/>
                 </a:solidFill>
                 <a:latin typeface="Arial"/>
               </a:rPr>
@@ -11711,7 +11711,7 @@
             </a:avLst>
           </a:prstGeom>
           <a:solidFill>
-            <a:srgbClr val="C2603E"/>
+            <a:srgbClr val="0089A8"/>
           </a:solidFill>
           <a:ln>
             <a:noFill/>
@@ -11801,7 +11801,7 @@
             <a:r>
               <a:rPr sz="1700" b="0">
                 <a:solidFill>
-                  <a:srgbClr val="1F1E1D"/>
+                  <a:srgbClr val="0F1B2D"/>
                 </a:solidFill>
                 <a:latin typeface="Arial"/>
               </a:rPr>
@@ -11827,7 +11827,7 @@
             </a:avLst>
           </a:prstGeom>
           <a:solidFill>
-            <a:srgbClr val="C2603E"/>
+            <a:srgbClr val="0089A8"/>
           </a:solidFill>
           <a:ln>
             <a:noFill/>
@@ -11917,7 +11917,7 @@
             <a:r>
               <a:rPr sz="1700" b="0">
                 <a:solidFill>
-                  <a:srgbClr val="1F1E1D"/>
+                  <a:srgbClr val="0F1B2D"/>
                 </a:solidFill>
                 <a:latin typeface="Arial"/>
               </a:rPr>
@@ -11943,7 +11943,7 @@
             </a:avLst>
           </a:prstGeom>
           <a:solidFill>
-            <a:srgbClr val="C2603E"/>
+            <a:srgbClr val="0089A8"/>
           </a:solidFill>
           <a:ln>
             <a:noFill/>
@@ -12033,7 +12033,7 @@
             <a:r>
               <a:rPr sz="1700" b="0">
                 <a:solidFill>
-                  <a:srgbClr val="1F1E1D"/>
+                  <a:srgbClr val="0F1B2D"/>
                 </a:solidFill>
                 <a:latin typeface="Arial"/>
               </a:rPr>
@@ -12059,7 +12059,7 @@
             </a:avLst>
           </a:prstGeom>
           <a:solidFill>
-            <a:srgbClr val="C2603E"/>
+            <a:srgbClr val="0089A8"/>
           </a:solidFill>
           <a:ln>
             <a:noFill/>
@@ -12149,7 +12149,7 @@
             <a:r>
               <a:rPr sz="1700" b="0">
                 <a:solidFill>
-                  <a:srgbClr val="1F1E1D"/>
+                  <a:srgbClr val="0F1B2D"/>
                 </a:solidFill>
                 <a:latin typeface="Arial"/>
               </a:rPr>
